--- a/courses/build/farmer-5day/F-D4.pptx
+++ b/courses/build/farmer-5day/F-D4.pptx
@@ -4878,7 +4878,7 @@
     <p:bg>
       <p:bgPr>
         <a:solidFill>
-          <a:srgbClr val="1F4D2B"/>
+          <a:srgbClr val="2F5D34"/>
         </a:solidFill>
         <a:effectLst/>
       </p:bgPr>
@@ -4920,9 +4920,9 @@
             <a:r>
               <a:rPr sz="1000" b="0">
                 <a:solidFill>
-                  <a:srgbClr val="A8D88A"/>
-                </a:solidFill>
-                <a:latin typeface="Arial"/>
+                  <a:srgbClr val="EFE6D2"/>
+                </a:solidFill>
+                <a:latin typeface="Verdana"/>
               </a:rPr>
               <a:t>F-D4-01</a:t>
             </a:r>
@@ -4959,9 +4959,9 @@
             <a:r>
               <a:rPr sz="1000" b="0">
                 <a:solidFill>
-                  <a:srgbClr val="A8D88A"/>
-                </a:solidFill>
-                <a:latin typeface="Arial"/>
+                  <a:srgbClr val="EFE6D2"/>
+                </a:solidFill>
+                <a:latin typeface="Verdana"/>
               </a:rPr>
               <a:t>Grow Food, Grow Strong</a:t>
             </a:r>
@@ -4998,9 +4998,9 @@
             <a:r>
               <a:rPr sz="4800" b="1">
                 <a:solidFill>
-                  <a:srgbClr val="F7F2E9"/>
-                </a:solidFill>
-                <a:latin typeface="Georgia"/>
+                  <a:srgbClr val="EFE6D2"/>
+                </a:solidFill>
+                <a:latin typeface="Rockwell"/>
               </a:rPr>
               <a:t>Day 4 · Plants</a:t>
             </a:r>
@@ -5022,7 +5022,7 @@
             <a:avLst/>
           </a:prstGeom>
           <a:solidFill>
-            <a:srgbClr val="C07A1E"/>
+            <a:srgbClr val="B24E2A"/>
           </a:solidFill>
           <a:ln>
             <a:noFill/>
@@ -5081,9 +5081,9 @@
             <a:r>
               <a:rPr sz="2400" b="0">
                 <a:solidFill>
-                  <a:srgbClr val="A8D88A"/>
-                </a:solidFill>
-                <a:latin typeface="Arial"/>
+                  <a:srgbClr val="EFE6D2"/>
+                </a:solidFill>
+                <a:latin typeface="Verdana"/>
               </a:rPr>
               <a:t>Today the beds come alive</a:t>
             </a:r>
@@ -5105,11 +5105,11 @@
             <a:avLst/>
           </a:prstGeom>
           <a:solidFill>
-            <a:srgbClr val="FBF6EC"/>
+            <a:srgbClr val="EFE6D2"/>
           </a:solidFill>
           <a:ln w="15875">
             <a:solidFill>
-              <a:srgbClr val="E2D8C4"/>
+              <a:srgbClr val="2F5D34"/>
             </a:solidFill>
           </a:ln>
           <a:effectLst/>
@@ -5166,9 +5166,9 @@
             <a:r>
               <a:rPr sz="1200" b="1">
                 <a:solidFill>
-                  <a:srgbClr val="C07A1E"/>
-                </a:solidFill>
-                <a:latin typeface="Arial"/>
+                  <a:srgbClr val="B24E2A"/>
+                </a:solidFill>
+                <a:latin typeface="Verdana"/>
               </a:rPr>
               <a:t>IMAGE · F-IMG-22 · coming</a:t>
             </a:r>
@@ -5205,9 +5205,9 @@
             <a:r>
               <a:rPr sz="1800" b="1">
                 <a:solidFill>
-                  <a:srgbClr val="1F4D2B"/>
-                </a:solidFill>
-                <a:latin typeface="Georgia"/>
+                  <a:srgbClr val="1B1A17"/>
+                </a:solidFill>
+                <a:latin typeface="Rockwell"/>
               </a:rPr>
               <a:t>Beds come alive</a:t>
             </a:r>
@@ -5244,9 +5244,9 @@
             <a:r>
               <a:rPr sz="1100" b="0">
                 <a:solidFill>
-                  <a:srgbClr val="20190F"/>
-                </a:solidFill>
-                <a:latin typeface="Arial"/>
+                  <a:srgbClr val="1B1A17"/>
+                </a:solidFill>
+                <a:latin typeface="Verdana"/>
               </a:rPr>
               <a:t>Morning light on five freshly layered, mulched beds with a group standing ready with seedling trays.</a:t>
             </a:r>
@@ -5267,7 +5267,7 @@
     <p:bg>
       <p:bgPr>
         <a:solidFill>
-          <a:srgbClr val="F7F2E9"/>
+          <a:srgbClr val="EFE6D2"/>
         </a:solidFill>
         <a:effectLst/>
       </p:bgPr>
@@ -5309,9 +5309,9 @@
             <a:r>
               <a:rPr sz="1000" b="0">
                 <a:solidFill>
-                  <a:srgbClr val="6B6255"/>
-                </a:solidFill>
-                <a:latin typeface="Arial"/>
+                  <a:srgbClr val="1B1A17"/>
+                </a:solidFill>
+                <a:latin typeface="Verdana"/>
               </a:rPr>
               <a:t>F-D4-10</a:t>
             </a:r>
@@ -5348,9 +5348,9 @@
             <a:r>
               <a:rPr sz="1000" b="0">
                 <a:solidFill>
-                  <a:srgbClr val="6B6255"/>
-                </a:solidFill>
-                <a:latin typeface="Arial"/>
+                  <a:srgbClr val="1B1A17"/>
+                </a:solidFill>
+                <a:latin typeface="Verdana"/>
               </a:rPr>
               <a:t>Grow Food, Grow Strong</a:t>
             </a:r>
@@ -5372,7 +5372,7 @@
             <a:avLst/>
           </a:prstGeom>
           <a:solidFill>
-            <a:srgbClr val="C07A1E"/>
+            <a:srgbClr val="B24E2A"/>
           </a:solidFill>
           <a:ln>
             <a:noFill/>
@@ -5431,9 +5431,9 @@
             <a:r>
               <a:rPr sz="1400" b="1">
                 <a:solidFill>
-                  <a:srgbClr val="F7F2E9"/>
-                </a:solidFill>
-                <a:latin typeface="Arial"/>
+                  <a:srgbClr val="EFE6D2"/>
+                </a:solidFill>
+                <a:latin typeface="Verdana"/>
               </a:rPr>
               <a:t>YOUR TURN</a:t>
             </a:r>
@@ -5470,9 +5470,9 @@
             <a:r>
               <a:rPr sz="3800" b="1">
                 <a:solidFill>
-                  <a:srgbClr val="1F4D2B"/>
-                </a:solidFill>
-                <a:latin typeface="Georgia"/>
+                  <a:srgbClr val="1B1A17"/>
+                </a:solidFill>
+                <a:latin typeface="Rockwell"/>
               </a:rPr>
               <a:t>Plant</a:t>
             </a:r>
@@ -5494,7 +5494,7 @@
             <a:avLst/>
           </a:prstGeom>
           <a:solidFill>
-            <a:srgbClr val="E2D8C4"/>
+            <a:srgbClr val="2F5D34"/>
           </a:solidFill>
           <a:ln>
             <a:noFill/>
@@ -5553,9 +5553,9 @@
             <a:r>
               <a:rPr sz="3000" b="1">
                 <a:solidFill>
-                  <a:srgbClr val="20190F"/>
-                </a:solidFill>
-                <a:latin typeface="Arial"/>
+                  <a:srgbClr val="1B1A17"/>
+                </a:solidFill>
+                <a:latin typeface="Verdana"/>
               </a:rPr>
               <a:t>•  Mark with the stick</a:t>
             </a:r>
@@ -5569,9 +5569,9 @@
             <a:r>
               <a:rPr sz="3000" b="1">
                 <a:solidFill>
-                  <a:srgbClr val="20190F"/>
-                </a:solidFill>
-                <a:latin typeface="Arial"/>
+                  <a:srgbClr val="1B1A17"/>
+                </a:solidFill>
+                <a:latin typeface="Verdana"/>
               </a:rPr>
               <a:t>•  Everyone plants at least 3</a:t>
             </a:r>
@@ -5585,9 +5585,9 @@
             <a:r>
               <a:rPr sz="3000" b="1">
                 <a:solidFill>
-                  <a:srgbClr val="20190F"/>
-                </a:solidFill>
-                <a:latin typeface="Arial"/>
+                  <a:srgbClr val="1B1A17"/>
+                </a:solidFill>
+                <a:latin typeface="Verdana"/>
               </a:rPr>
               <a:t>•  Water gently · mulch between</a:t>
             </a:r>
@@ -5609,11 +5609,11 @@
             <a:avLst/>
           </a:prstGeom>
           <a:solidFill>
-            <a:srgbClr val="FBF6EC"/>
+            <a:srgbClr val="EFE6D2"/>
           </a:solidFill>
           <a:ln w="15875">
             <a:solidFill>
-              <a:srgbClr val="E2D8C4"/>
+              <a:srgbClr val="2F5D34"/>
             </a:solidFill>
           </a:ln>
           <a:effectLst/>
@@ -5670,9 +5670,9 @@
             <a:r>
               <a:rPr sz="1200" b="1">
                 <a:solidFill>
-                  <a:srgbClr val="C07A1E"/>
-                </a:solidFill>
-                <a:latin typeface="Arial"/>
+                  <a:srgbClr val="B24E2A"/>
+                </a:solidFill>
+                <a:latin typeface="Verdana"/>
               </a:rPr>
               <a:t>IMAGE · F-IMG-27 · coming</a:t>
             </a:r>
@@ -5709,9 +5709,9 @@
             <a:r>
               <a:rPr sz="1800" b="1">
                 <a:solidFill>
-                  <a:srgbClr val="1F4D2B"/>
-                </a:solidFill>
-                <a:latin typeface="Georgia"/>
+                  <a:srgbClr val="1B1A17"/>
+                </a:solidFill>
+                <a:latin typeface="Rockwell"/>
               </a:rPr>
               <a:t>Planting out</a:t>
             </a:r>
@@ -5748,9 +5748,9 @@
             <a:r>
               <a:rPr sz="1100" b="0">
                 <a:solidFill>
-                  <a:srgbClr val="20190F"/>
-                </a:solidFill>
-                <a:latin typeface="Arial"/>
+                  <a:srgbClr val="1B1A17"/>
+                </a:solidFill>
+                <a:latin typeface="Verdana"/>
               </a:rPr>
               <a:t>Learners on both sides of a bed transplanting seedlings with a spacing stick laid across; watering can and mulch.</a:t>
             </a:r>
@@ -5771,7 +5771,7 @@
     <p:bg>
       <p:bgPr>
         <a:solidFill>
-          <a:srgbClr val="F7F2E9"/>
+          <a:srgbClr val="EFE6D2"/>
         </a:solidFill>
         <a:effectLst/>
       </p:bgPr>
@@ -5813,9 +5813,9 @@
             <a:r>
               <a:rPr sz="1000" b="0">
                 <a:solidFill>
-                  <a:srgbClr val="6B6255"/>
-                </a:solidFill>
-                <a:latin typeface="Arial"/>
+                  <a:srgbClr val="1B1A17"/>
+                </a:solidFill>
+                <a:latin typeface="Verdana"/>
               </a:rPr>
               <a:t>F-D4-11</a:t>
             </a:r>
@@ -5852,9 +5852,9 @@
             <a:r>
               <a:rPr sz="1000" b="0">
                 <a:solidFill>
-                  <a:srgbClr val="6B6255"/>
-                </a:solidFill>
-                <a:latin typeface="Arial"/>
+                  <a:srgbClr val="1B1A17"/>
+                </a:solidFill>
+                <a:latin typeface="Verdana"/>
               </a:rPr>
               <a:t>Grow Food, Grow Strong</a:t>
             </a:r>
@@ -5876,7 +5876,7 @@
             <a:avLst/>
           </a:prstGeom>
           <a:solidFill>
-            <a:srgbClr val="C07A1E"/>
+            <a:srgbClr val="B24E2A"/>
           </a:solidFill>
           <a:ln>
             <a:noFill/>
@@ -5935,9 +5935,9 @@
             <a:r>
               <a:rPr sz="1400" b="1">
                 <a:solidFill>
-                  <a:srgbClr val="F7F2E9"/>
-                </a:solidFill>
-                <a:latin typeface="Arial"/>
+                  <a:srgbClr val="EFE6D2"/>
+                </a:solidFill>
+                <a:latin typeface="Verdana"/>
               </a:rPr>
               <a:t>YOUR TURN</a:t>
             </a:r>
@@ -5974,9 +5974,9 @@
             <a:r>
               <a:rPr sz="3800" b="1">
                 <a:solidFill>
-                  <a:srgbClr val="1F4D2B"/>
-                </a:solidFill>
-                <a:latin typeface="Georgia"/>
+                  <a:srgbClr val="1B1A17"/>
+                </a:solidFill>
+                <a:latin typeface="Rockwell"/>
               </a:rPr>
               <a:t>Pest or friend?</a:t>
             </a:r>
@@ -5998,7 +5998,7 @@
             <a:avLst/>
           </a:prstGeom>
           <a:solidFill>
-            <a:srgbClr val="E2D8C4"/>
+            <a:srgbClr val="2F5D34"/>
           </a:solidFill>
           <a:ln>
             <a:noFill/>
@@ -6057,9 +6057,9 @@
             <a:r>
               <a:rPr sz="3000" b="1">
                 <a:solidFill>
-                  <a:srgbClr val="20190F"/>
-                </a:solidFill>
-                <a:latin typeface="Arial"/>
+                  <a:srgbClr val="1B1A17"/>
+                </a:solidFill>
+                <a:latin typeface="Verdana"/>
               </a:rPr>
               <a:t>•  Find one of each</a:t>
             </a:r>
@@ -6073,9 +6073,9 @@
             <a:r>
               <a:rPr sz="3000" b="1">
                 <a:solidFill>
-                  <a:srgbClr val="20190F"/>
-                </a:solidFill>
-                <a:latin typeface="Arial"/>
+                  <a:srgbClr val="1B1A17"/>
+                </a:solidFill>
+                <a:latin typeface="Verdana"/>
               </a:rPr>
               <a:t>•  Look under the leaves</a:t>
             </a:r>
@@ -6097,11 +6097,11 @@
             <a:avLst/>
           </a:prstGeom>
           <a:solidFill>
-            <a:srgbClr val="FBF6EC"/>
+            <a:srgbClr val="EFE6D2"/>
           </a:solidFill>
           <a:ln w="15875">
             <a:solidFill>
-              <a:srgbClr val="E2D8C4"/>
+              <a:srgbClr val="2F5D34"/>
             </a:solidFill>
           </a:ln>
           <a:effectLst/>
@@ -6158,9 +6158,9 @@
             <a:r>
               <a:rPr sz="1200" b="1">
                 <a:solidFill>
-                  <a:srgbClr val="C07A1E"/>
-                </a:solidFill>
-                <a:latin typeface="Arial"/>
+                  <a:srgbClr val="B24E2A"/>
+                </a:solidFill>
+                <a:latin typeface="Verdana"/>
               </a:rPr>
               <a:t>IMAGE · F-IMG-40 · coming</a:t>
             </a:r>
@@ -6197,9 +6197,9 @@
             <a:r>
               <a:rPr sz="1800" b="1">
                 <a:solidFill>
-                  <a:srgbClr val="1F4D2B"/>
-                </a:solidFill>
-                <a:latin typeface="Georgia"/>
+                  <a:srgbClr val="1B1A17"/>
+                </a:solidFill>
+                <a:latin typeface="Rockwell"/>
               </a:rPr>
               <a:t>Pest &amp; friend card — Aphids on a stem</a:t>
             </a:r>
@@ -6236,9 +6236,9 @@
             <a:r>
               <a:rPr sz="1100" b="0">
                 <a:solidFill>
-                  <a:srgbClr val="20190F"/>
-                </a:solidFill>
-                <a:latin typeface="Arial"/>
+                  <a:srgbClr val="1B1A17"/>
+                </a:solidFill>
+                <a:latin typeface="Verdana"/>
               </a:rPr>
               <a:t>Aphids on a stem — a pest. Clear, large, accurate enough to recognise in the garden; plain Paper background; no text. A small Leaf-green border for friends and an Ochre border for pests.</a:t>
             </a:r>
@@ -6259,7 +6259,7 @@
     <p:bg>
       <p:bgPr>
         <a:solidFill>
-          <a:srgbClr val="F7F2E9"/>
+          <a:srgbClr val="EFE6D2"/>
         </a:solidFill>
         <a:effectLst/>
       </p:bgPr>
@@ -6301,9 +6301,9 @@
             <a:r>
               <a:rPr sz="1000" b="0">
                 <a:solidFill>
-                  <a:srgbClr val="6B6255"/>
-                </a:solidFill>
-                <a:latin typeface="Arial"/>
+                  <a:srgbClr val="1B1A17"/>
+                </a:solidFill>
+                <a:latin typeface="Verdana"/>
               </a:rPr>
               <a:t>F-D4-12   ·   Poster F-P16</a:t>
             </a:r>
@@ -6340,9 +6340,9 @@
             <a:r>
               <a:rPr sz="1000" b="0">
                 <a:solidFill>
-                  <a:srgbClr val="6B6255"/>
-                </a:solidFill>
-                <a:latin typeface="Arial"/>
+                  <a:srgbClr val="1B1A17"/>
+                </a:solidFill>
+                <a:latin typeface="Verdana"/>
               </a:rPr>
               <a:t>Grow Food, Grow Strong</a:t>
             </a:r>
@@ -6379,9 +6379,9 @@
             <a:r>
               <a:rPr sz="3800" b="1">
                 <a:solidFill>
-                  <a:srgbClr val="1F4D2B"/>
-                </a:solidFill>
-                <a:latin typeface="Georgia"/>
+                  <a:srgbClr val="1B1A17"/>
+                </a:solidFill>
+                <a:latin typeface="Rockwell"/>
               </a:rPr>
               <a:t>Climb from the bottom</a:t>
             </a:r>
@@ -6403,7 +6403,7 @@
             <a:avLst/>
           </a:prstGeom>
           <a:solidFill>
-            <a:srgbClr val="E2D8C4"/>
+            <a:srgbClr val="2F5D34"/>
           </a:solidFill>
           <a:ln>
             <a:noFill/>
@@ -6462,9 +6462,9 @@
             <a:r>
               <a:rPr sz="2400" b="0">
                 <a:solidFill>
-                  <a:srgbClr val="20190F"/>
-                </a:solidFill>
-                <a:latin typeface="Arial"/>
+                  <a:srgbClr val="1B1A17"/>
+                </a:solidFill>
+                <a:latin typeface="Verdana"/>
               </a:rPr>
               <a:t>•  Healthy soil · many plants · look often</a:t>
             </a:r>
@@ -6478,9 +6478,9 @@
             <a:r>
               <a:rPr sz="2400" b="0">
                 <a:solidFill>
-                  <a:srgbClr val="20190F"/>
-                </a:solidFill>
-                <a:latin typeface="Arial"/>
+                  <a:srgbClr val="1B1A17"/>
+                </a:solidFill>
+                <a:latin typeface="Verdana"/>
               </a:rPr>
               <a:t>•  Hands and barriers · invite friends</a:t>
             </a:r>
@@ -6494,9 +6494,9 @@
             <a:r>
               <a:rPr sz="2400" b="0">
                 <a:solidFill>
-                  <a:srgbClr val="20190F"/>
-                </a:solidFill>
-                <a:latin typeface="Arial"/>
+                  <a:srgbClr val="1B1A17"/>
+                </a:solidFill>
+                <a:latin typeface="Verdana"/>
               </a:rPr>
               <a:t>•  Home-made spray · poison last</a:t>
             </a:r>
@@ -6518,11 +6518,11 @@
             <a:avLst/>
           </a:prstGeom>
           <a:solidFill>
-            <a:srgbClr val="FBF6EC"/>
+            <a:srgbClr val="EFE6D2"/>
           </a:solidFill>
           <a:ln w="15875">
             <a:solidFill>
-              <a:srgbClr val="E2D8C4"/>
+              <a:srgbClr val="2F5D34"/>
             </a:solidFill>
           </a:ln>
           <a:effectLst/>
@@ -6579,9 +6579,9 @@
             <a:r>
               <a:rPr sz="1200" b="1">
                 <a:solidFill>
-                  <a:srgbClr val="C07A1E"/>
-                </a:solidFill>
-                <a:latin typeface="Arial"/>
+                  <a:srgbClr val="B24E2A"/>
+                </a:solidFill>
+                <a:latin typeface="Verdana"/>
               </a:rPr>
               <a:t>POSTER ART · F-P16-ART · coming</a:t>
             </a:r>
@@ -6618,9 +6618,9 @@
             <a:r>
               <a:rPr sz="1800" b="1">
                 <a:solidFill>
-                  <a:srgbClr val="1F4D2B"/>
-                </a:solidFill>
-                <a:latin typeface="Georgia"/>
+                  <a:srgbClr val="1B1A17"/>
+                </a:solidFill>
+                <a:latin typeface="Rockwell"/>
               </a:rPr>
               <a:t>Artwork for F-P16 · Healthy garden, fewer pests</a:t>
             </a:r>
@@ -6657,9 +6657,9 @@
             <a:r>
               <a:rPr sz="1100" b="0">
                 <a:solidFill>
-                  <a:srgbClr val="20190F"/>
-                </a:solidFill>
-                <a:latin typeface="Arial"/>
+                  <a:srgbClr val="1B1A17"/>
+                </a:solidFill>
+                <a:latin typeface="Verdana"/>
               </a:rPr>
               <a:t>A tall wooden ladder with seven rungs, filling the height of the poster. Beside each rung, a small scene (bottom to top): 1 dark soil with worms and a strong plant; 2 a mixed bed with flowers; 3 a person looking under a leaf; 4 hands picking a caterpillar, a toilet-roll collar round a seedling, a net over a bed; 5 a ladybird, a bird, a frog, a spider on…</a:t>
             </a:r>
@@ -6680,7 +6680,7 @@
     <p:bg>
       <p:bgPr>
         <a:solidFill>
-          <a:srgbClr val="F7F2E9"/>
+          <a:srgbClr val="EFE6D2"/>
         </a:solidFill>
         <a:effectLst/>
       </p:bgPr>
@@ -6722,9 +6722,9 @@
             <a:r>
               <a:rPr sz="1000" b="0">
                 <a:solidFill>
-                  <a:srgbClr val="6B6255"/>
-                </a:solidFill>
-                <a:latin typeface="Arial"/>
+                  <a:srgbClr val="1B1A17"/>
+                </a:solidFill>
+                <a:latin typeface="Verdana"/>
               </a:rPr>
               <a:t>F-D4-13   ·   Poster F-P16</a:t>
             </a:r>
@@ -6761,9 +6761,9 @@
             <a:r>
               <a:rPr sz="1000" b="0">
                 <a:solidFill>
-                  <a:srgbClr val="6B6255"/>
-                </a:solidFill>
-                <a:latin typeface="Arial"/>
+                  <a:srgbClr val="1B1A17"/>
+                </a:solidFill>
+                <a:latin typeface="Verdana"/>
               </a:rPr>
               <a:t>Grow Food, Grow Strong</a:t>
             </a:r>
@@ -6785,7 +6785,7 @@
             <a:avLst/>
           </a:prstGeom>
           <a:solidFill>
-            <a:srgbClr val="C07A1E"/>
+            <a:srgbClr val="B24E2A"/>
           </a:solidFill>
           <a:ln>
             <a:noFill/>
@@ -6844,9 +6844,9 @@
             <a:r>
               <a:rPr sz="1400" b="1">
                 <a:solidFill>
-                  <a:srgbClr val="F7F2E9"/>
-                </a:solidFill>
-                <a:latin typeface="Arial"/>
+                  <a:srgbClr val="EFE6D2"/>
+                </a:solidFill>
+                <a:latin typeface="Verdana"/>
               </a:rPr>
               <a:t>YOUR TURN</a:t>
             </a:r>
@@ -6883,9 +6883,9 @@
             <a:r>
               <a:rPr sz="3800" b="1">
                 <a:solidFill>
-                  <a:srgbClr val="1F4D2B"/>
-                </a:solidFill>
-                <a:latin typeface="Georgia"/>
+                  <a:srgbClr val="1B1A17"/>
+                </a:solidFill>
+                <a:latin typeface="Rockwell"/>
               </a:rPr>
               <a:t>Garlic-chilli spray</a:t>
             </a:r>
@@ -6907,7 +6907,7 @@
             <a:avLst/>
           </a:prstGeom>
           <a:solidFill>
-            <a:srgbClr val="E2D8C4"/>
+            <a:srgbClr val="2F5D34"/>
           </a:solidFill>
           <a:ln>
             <a:noFill/>
@@ -6966,9 +6966,9 @@
             <a:r>
               <a:rPr sz="2600" b="1">
                 <a:solidFill>
-                  <a:srgbClr val="20190F"/>
-                </a:solidFill>
-                <a:latin typeface="Arial"/>
+                  <a:srgbClr val="1B1A17"/>
+                </a:solidFill>
+                <a:latin typeface="Verdana"/>
               </a:rPr>
               <a:t>•  Garlic + chilli + onion + water, overnight</a:t>
             </a:r>
@@ -6982,9 +6982,9 @@
             <a:r>
               <a:rPr sz="2600" b="1">
                 <a:solidFill>
-                  <a:srgbClr val="20190F"/>
-                </a:solidFill>
-                <a:latin typeface="Arial"/>
+                  <a:srgbClr val="1B1A17"/>
+                </a:solidFill>
+                <a:latin typeface="Verdana"/>
               </a:rPr>
               <a:t>•  Strain · add a little plain soap</a:t>
             </a:r>
@@ -6998,9 +6998,9 @@
             <a:r>
               <a:rPr sz="2600" b="1">
                 <a:solidFill>
-                  <a:srgbClr val="20190F"/>
-                </a:solidFill>
-                <a:latin typeface="Arial"/>
+                  <a:srgbClr val="1B1A17"/>
+                </a:solidFill>
+                <a:latin typeface="Verdana"/>
               </a:rPr>
               <a:t>•  1 cup to 4 cups water · test first</a:t>
             </a:r>
@@ -7022,11 +7022,11 @@
             <a:avLst/>
           </a:prstGeom>
           <a:solidFill>
-            <a:srgbClr val="FBF6EC"/>
+            <a:srgbClr val="EFE6D2"/>
           </a:solidFill>
           <a:ln w="15875">
             <a:solidFill>
-              <a:srgbClr val="E2D8C4"/>
+              <a:srgbClr val="2F5D34"/>
             </a:solidFill>
           </a:ln>
           <a:effectLst/>
@@ -7083,9 +7083,9 @@
             <a:r>
               <a:rPr sz="1200" b="1">
                 <a:solidFill>
-                  <a:srgbClr val="C07A1E"/>
-                </a:solidFill>
-                <a:latin typeface="Arial"/>
+                  <a:srgbClr val="B24E2A"/>
+                </a:solidFill>
+                <a:latin typeface="Verdana"/>
               </a:rPr>
               <a:t>IMAGE · F-IMG-28 · coming</a:t>
             </a:r>
@@ -7122,9 +7122,9 @@
             <a:r>
               <a:rPr sz="1800" b="1">
                 <a:solidFill>
-                  <a:srgbClr val="1F4D2B"/>
-                </a:solidFill>
-                <a:latin typeface="Georgia"/>
+                  <a:srgbClr val="1B1A17"/>
+                </a:solidFill>
+                <a:latin typeface="Rockwell"/>
               </a:rPr>
               <a:t>Garlic-chilli spray</a:t>
             </a:r>
@@ -7161,9 +7161,9 @@
             <a:r>
               <a:rPr sz="1100" b="0">
                 <a:solidFill>
-                  <a:srgbClr val="20190F"/>
-                </a:solidFill>
-                <a:latin typeface="Arial"/>
+                  <a:srgbClr val="1B1A17"/>
+                </a:solidFill>
+                <a:latin typeface="Verdana"/>
               </a:rPr>
               <a:t>On a board: a garlic bulb, red chillies, an onion, a 2 L bottle of water, a cloth strainer, a bar of plain soap, a spray bottle, and gloves.</a:t>
             </a:r>
@@ -7184,7 +7184,7 @@
     <p:bg>
       <p:bgPr>
         <a:solidFill>
-          <a:srgbClr val="F7F2E9"/>
+          <a:srgbClr val="EFE6D2"/>
         </a:solidFill>
         <a:effectLst/>
       </p:bgPr>
@@ -7226,9 +7226,9 @@
             <a:r>
               <a:rPr sz="1000" b="0">
                 <a:solidFill>
-                  <a:srgbClr val="6B6255"/>
-                </a:solidFill>
-                <a:latin typeface="Arial"/>
+                  <a:srgbClr val="1B1A17"/>
+                </a:solidFill>
+                <a:latin typeface="Verdana"/>
               </a:rPr>
               <a:t>F-D4-14</a:t>
             </a:r>
@@ -7265,9 +7265,9 @@
             <a:r>
               <a:rPr sz="1000" b="0">
                 <a:solidFill>
-                  <a:srgbClr val="6B6255"/>
-                </a:solidFill>
-                <a:latin typeface="Arial"/>
+                  <a:srgbClr val="1B1A17"/>
+                </a:solidFill>
+                <a:latin typeface="Verdana"/>
               </a:rPr>
               <a:t>Grow Food, Grow Strong</a:t>
             </a:r>
@@ -7289,7 +7289,7 @@
             <a:avLst/>
           </a:prstGeom>
           <a:solidFill>
-            <a:srgbClr val="C07A1E"/>
+            <a:srgbClr val="B24E2A"/>
           </a:solidFill>
           <a:ln>
             <a:noFill/>
@@ -7348,9 +7348,9 @@
             <a:r>
               <a:rPr sz="1400" b="1">
                 <a:solidFill>
-                  <a:srgbClr val="F7F2E9"/>
-                </a:solidFill>
-                <a:latin typeface="Arial"/>
+                  <a:srgbClr val="EFE6D2"/>
+                </a:solidFill>
+                <a:latin typeface="Verdana"/>
               </a:rPr>
               <a:t>YOUR TURN</a:t>
             </a:r>
@@ -7387,9 +7387,9 @@
             <a:r>
               <a:rPr sz="3800" b="1">
                 <a:solidFill>
-                  <a:srgbClr val="1F4D2B"/>
-                </a:solidFill>
-                <a:latin typeface="Georgia"/>
+                  <a:srgbClr val="1B1A17"/>
+                </a:solidFill>
+                <a:latin typeface="Rockwell"/>
               </a:rPr>
               <a:t>Collars and traps</a:t>
             </a:r>
@@ -7411,7 +7411,7 @@
             <a:avLst/>
           </a:prstGeom>
           <a:solidFill>
-            <a:srgbClr val="E2D8C4"/>
+            <a:srgbClr val="2F5D34"/>
           </a:solidFill>
           <a:ln>
             <a:noFill/>
@@ -7470,9 +7470,9 @@
             <a:r>
               <a:rPr sz="2600" b="1">
                 <a:solidFill>
-                  <a:srgbClr val="20190F"/>
-                </a:solidFill>
-                <a:latin typeface="Arial"/>
+                  <a:srgbClr val="1B1A17"/>
+                </a:solidFill>
+                <a:latin typeface="Verdana"/>
               </a:rPr>
               <a:t>•  Toilet-roll collar round a seedling</a:t>
             </a:r>
@@ -7486,9 +7486,9 @@
             <a:r>
               <a:rPr sz="2600" b="1">
                 <a:solidFill>
-                  <a:srgbClr val="20190F"/>
-                </a:solidFill>
-                <a:latin typeface="Arial"/>
+                  <a:srgbClr val="1B1A17"/>
+                </a:solidFill>
+                <a:latin typeface="Verdana"/>
               </a:rPr>
               <a:t>•  A board for slugs overnight</a:t>
             </a:r>
@@ -7510,11 +7510,11 @@
             <a:avLst/>
           </a:prstGeom>
           <a:solidFill>
-            <a:srgbClr val="FBF6EC"/>
+            <a:srgbClr val="EFE6D2"/>
           </a:solidFill>
           <a:ln w="15875">
             <a:solidFill>
-              <a:srgbClr val="E2D8C4"/>
+              <a:srgbClr val="2F5D34"/>
             </a:solidFill>
           </a:ln>
           <a:effectLst/>
@@ -7571,9 +7571,9 @@
             <a:r>
               <a:rPr sz="1200" b="1">
                 <a:solidFill>
-                  <a:srgbClr val="C07A1E"/>
-                </a:solidFill>
-                <a:latin typeface="Arial"/>
+                  <a:srgbClr val="B24E2A"/>
+                </a:solidFill>
+                <a:latin typeface="Verdana"/>
               </a:rPr>
               <a:t>IMAGE · F-IMG-29 · coming</a:t>
             </a:r>
@@ -7610,9 +7610,9 @@
             <a:r>
               <a:rPr sz="1800" b="1">
                 <a:solidFill>
-                  <a:srgbClr val="1F4D2B"/>
-                </a:solidFill>
-                <a:latin typeface="Georgia"/>
+                  <a:srgbClr val="1B1A17"/>
+                </a:solidFill>
+                <a:latin typeface="Rockwell"/>
               </a:rPr>
               <a:t>Collar and trap</a:t>
             </a:r>
@@ -7649,9 +7649,9 @@
             <a:r>
               <a:rPr sz="1100" b="0">
                 <a:solidFill>
-                  <a:srgbClr val="20190F"/>
-                </a:solidFill>
-                <a:latin typeface="Arial"/>
+                  <a:srgbClr val="1B1A17"/>
+                </a:solidFill>
+                <a:latin typeface="Verdana"/>
               </a:rPr>
               <a:t>A cardboard toilet-roll tube pushed into soil around a young stem; beside it a board lifted to show slugs underneath.</a:t>
             </a:r>
@@ -7672,7 +7672,7 @@
     <p:bg>
       <p:bgPr>
         <a:solidFill>
-          <a:srgbClr val="F7F2E9"/>
+          <a:srgbClr val="EFE6D2"/>
         </a:solidFill>
         <a:effectLst/>
       </p:bgPr>
@@ -7714,9 +7714,9 @@
             <a:r>
               <a:rPr sz="1000" b="0">
                 <a:solidFill>
-                  <a:srgbClr val="6B6255"/>
-                </a:solidFill>
-                <a:latin typeface="Arial"/>
+                  <a:srgbClr val="1B1A17"/>
+                </a:solidFill>
+                <a:latin typeface="Verdana"/>
               </a:rPr>
               <a:t>F-D4-15   ·   Poster F-P15</a:t>
             </a:r>
@@ -7753,9 +7753,9 @@
             <a:r>
               <a:rPr sz="1000" b="0">
                 <a:solidFill>
-                  <a:srgbClr val="6B6255"/>
-                </a:solidFill>
-                <a:latin typeface="Arial"/>
+                  <a:srgbClr val="1B1A17"/>
+                </a:solidFill>
+                <a:latin typeface="Verdana"/>
               </a:rPr>
               <a:t>Grow Food, Grow Strong</a:t>
             </a:r>
@@ -7792,9 +7792,9 @@
             <a:r>
               <a:rPr sz="3800" b="1">
                 <a:solidFill>
-                  <a:srgbClr val="1F4D2B"/>
-                </a:solidFill>
-                <a:latin typeface="Georgia"/>
+                  <a:srgbClr val="1B1A17"/>
+                </a:solidFill>
+                <a:latin typeface="Rockwell"/>
               </a:rPr>
               <a:t>Rotate every season</a:t>
             </a:r>
@@ -7816,7 +7816,7 @@
             <a:avLst/>
           </a:prstGeom>
           <a:solidFill>
-            <a:srgbClr val="E2D8C4"/>
+            <a:srgbClr val="2F5D34"/>
           </a:solidFill>
           <a:ln>
             <a:noFill/>
@@ -7875,9 +7875,9 @@
             <a:r>
               <a:rPr sz="2400" b="0">
                 <a:solidFill>
-                  <a:srgbClr val="20190F"/>
-                </a:solidFill>
-                <a:latin typeface="Arial"/>
+                  <a:srgbClr val="1B1A17"/>
+                </a:solidFill>
+                <a:latin typeface="Verdana"/>
               </a:rPr>
               <a:t>•  Beans → Leaves → Fruits → Roots</a:t>
             </a:r>
@@ -7899,11 +7899,11 @@
             <a:avLst/>
           </a:prstGeom>
           <a:solidFill>
-            <a:srgbClr val="FBF6EC"/>
+            <a:srgbClr val="EFE6D2"/>
           </a:solidFill>
           <a:ln w="15875">
             <a:solidFill>
-              <a:srgbClr val="E2D8C4"/>
+              <a:srgbClr val="2F5D34"/>
             </a:solidFill>
           </a:ln>
           <a:effectLst/>
@@ -7960,9 +7960,9 @@
             <a:r>
               <a:rPr sz="1200" b="1">
                 <a:solidFill>
-                  <a:srgbClr val="C07A1E"/>
-                </a:solidFill>
-                <a:latin typeface="Arial"/>
+                  <a:srgbClr val="B24E2A"/>
+                </a:solidFill>
+                <a:latin typeface="Verdana"/>
               </a:rPr>
               <a:t>ANIMATION · F-ANI-22 · coming</a:t>
             </a:r>
@@ -7999,9 +7999,9 @@
             <a:r>
               <a:rPr sz="1800" b="1">
                 <a:solidFill>
-                  <a:srgbClr val="1F4D2B"/>
-                </a:solidFill>
-                <a:latin typeface="Georgia"/>
+                  <a:srgbClr val="1B1A17"/>
+                </a:solidFill>
+                <a:latin typeface="Rockwell"/>
               </a:rPr>
               <a:t>Rotation wheel</a:t>
             </a:r>
@@ -8038,9 +8038,9 @@
             <a:r>
               <a:rPr sz="1100" b="0">
                 <a:solidFill>
-                  <a:srgbClr val="20190F"/>
-                </a:solidFill>
-                <a:latin typeface="Arial"/>
+                  <a:srgbClr val="1B1A17"/>
+                </a:solidFill>
+                <a:latin typeface="Verdana"/>
               </a:rPr>
               <a:t>Four beds arranged as quarters of a circle seen from above, each with one crop group: bean pods; leafy heads; round fruits (tomato/pumpkin shapes); roots (carrot/beetroot shown in cut-away). Every 3 s the crops rotate one quarter clockwise while the soil colour under the bean quarter darkens slightly as it passes (showing the soil being fed). A season…</a:t>
             </a:r>
@@ -8061,7 +8061,7 @@
     <p:bg>
       <p:bgPr>
         <a:solidFill>
-          <a:srgbClr val="F7F2E9"/>
+          <a:srgbClr val="EFE6D2"/>
         </a:solidFill>
         <a:effectLst/>
       </p:bgPr>
@@ -8103,9 +8103,9 @@
             <a:r>
               <a:rPr sz="1000" b="0">
                 <a:solidFill>
-                  <a:srgbClr val="6B6255"/>
-                </a:solidFill>
-                <a:latin typeface="Arial"/>
+                  <a:srgbClr val="1B1A17"/>
+                </a:solidFill>
+                <a:latin typeface="Verdana"/>
               </a:rPr>
               <a:t>F-D4-16   ·   Poster F-P17</a:t>
             </a:r>
@@ -8142,9 +8142,9 @@
             <a:r>
               <a:rPr sz="1000" b="0">
                 <a:solidFill>
-                  <a:srgbClr val="6B6255"/>
-                </a:solidFill>
-                <a:latin typeface="Arial"/>
+                  <a:srgbClr val="1B1A17"/>
+                </a:solidFill>
+                <a:latin typeface="Verdana"/>
               </a:rPr>
               <a:t>Grow Food, Grow Strong</a:t>
             </a:r>
@@ -8181,9 +8181,9 @@
             <a:r>
               <a:rPr sz="3800" b="1">
                 <a:solidFill>
-                  <a:srgbClr val="1F4D2B"/>
-                </a:solidFill>
-                <a:latin typeface="Georgia"/>
+                  <a:srgbClr val="1B1A17"/>
+                </a:solidFill>
+                <a:latin typeface="Rockwell"/>
               </a:rPr>
               <a:t>Plant like a forest</a:t>
             </a:r>
@@ -8205,7 +8205,7 @@
             <a:avLst/>
           </a:prstGeom>
           <a:solidFill>
-            <a:srgbClr val="E2D8C4"/>
+            <a:srgbClr val="2F5D34"/>
           </a:solidFill>
           <a:ln>
             <a:noFill/>
@@ -8264,9 +8264,9 @@
             <a:r>
               <a:rPr sz="2400" b="0">
                 <a:solidFill>
-                  <a:srgbClr val="20190F"/>
-                </a:solidFill>
-                <a:latin typeface="Arial"/>
+                  <a:srgbClr val="1B1A17"/>
+                </a:solidFill>
+                <a:latin typeface="Verdana"/>
               </a:rPr>
               <a:t>•  Tall tree · small tree · bush · herbs</a:t>
             </a:r>
@@ -8280,9 +8280,9 @@
             <a:r>
               <a:rPr sz="2400" b="0">
                 <a:solidFill>
-                  <a:srgbClr val="20190F"/>
-                </a:solidFill>
-                <a:latin typeface="Arial"/>
+                  <a:srgbClr val="1B1A17"/>
+                </a:solidFill>
+                <a:latin typeface="Verdana"/>
               </a:rPr>
               <a:t>•  Ground cover · roots · climbers</a:t>
             </a:r>
@@ -8328,7 +8328,7 @@
             <a:avLst/>
           </a:prstGeom>
           <a:solidFill>
-            <a:srgbClr val="20190F"/>
+            <a:srgbClr val="1B1A17"/>
           </a:solidFill>
           <a:ln>
             <a:noFill/>
@@ -8387,9 +8387,9 @@
             <a:r>
               <a:rPr sz="1100" b="0">
                 <a:solidFill>
-                  <a:srgbClr val="F7F2E9"/>
-                </a:solidFill>
-                <a:latin typeface="Arial"/>
+                  <a:srgbClr val="EFE6D2"/>
+                </a:solidFill>
+                <a:latin typeface="Verdana"/>
               </a:rPr>
               <a:t>▶  Clip F-ANI-23 · play from the tablet: watch-05-seven-layers.mp4</a:t>
             </a:r>
@@ -8410,7 +8410,7 @@
     <p:bg>
       <p:bgPr>
         <a:solidFill>
-          <a:srgbClr val="F7F2E9"/>
+          <a:srgbClr val="EFE6D2"/>
         </a:solidFill>
         <a:effectLst/>
       </p:bgPr>
@@ -8452,9 +8452,9 @@
             <a:r>
               <a:rPr sz="1000" b="0">
                 <a:solidFill>
-                  <a:srgbClr val="6B6255"/>
-                </a:solidFill>
-                <a:latin typeface="Arial"/>
+                  <a:srgbClr val="1B1A17"/>
+                </a:solidFill>
+                <a:latin typeface="Verdana"/>
               </a:rPr>
               <a:t>F-D4-17   ·   Poster F-P17</a:t>
             </a:r>
@@ -8491,9 +8491,9 @@
             <a:r>
               <a:rPr sz="1000" b="0">
                 <a:solidFill>
-                  <a:srgbClr val="6B6255"/>
-                </a:solidFill>
-                <a:latin typeface="Arial"/>
+                  <a:srgbClr val="1B1A17"/>
+                </a:solidFill>
+                <a:latin typeface="Verdana"/>
               </a:rPr>
               <a:t>Grow Food, Grow Strong</a:t>
             </a:r>
@@ -8515,7 +8515,7 @@
             <a:avLst/>
           </a:prstGeom>
           <a:solidFill>
-            <a:srgbClr val="C07A1E"/>
+            <a:srgbClr val="B24E2A"/>
           </a:solidFill>
           <a:ln>
             <a:noFill/>
@@ -8574,9 +8574,9 @@
             <a:r>
               <a:rPr sz="1400" b="1">
                 <a:solidFill>
-                  <a:srgbClr val="F7F2E9"/>
-                </a:solidFill>
-                <a:latin typeface="Arial"/>
+                  <a:srgbClr val="EFE6D2"/>
+                </a:solidFill>
+                <a:latin typeface="Verdana"/>
               </a:rPr>
               <a:t>YOUR TURN</a:t>
             </a:r>
@@ -8613,9 +8613,9 @@
             <a:r>
               <a:rPr sz="3800" b="1">
                 <a:solidFill>
-                  <a:srgbClr val="1F4D2B"/>
-                </a:solidFill>
-                <a:latin typeface="Georgia"/>
+                  <a:srgbClr val="1B1A17"/>
+                </a:solidFill>
+                <a:latin typeface="Rockwell"/>
               </a:rPr>
               <a:t>Plant a fruit tree</a:t>
             </a:r>
@@ -8637,7 +8637,7 @@
             <a:avLst/>
           </a:prstGeom>
           <a:solidFill>
-            <a:srgbClr val="E2D8C4"/>
+            <a:srgbClr val="2F5D34"/>
           </a:solidFill>
           <a:ln>
             <a:noFill/>
@@ -8696,9 +8696,9 @@
             <a:r>
               <a:rPr sz="2600" b="1">
                 <a:solidFill>
-                  <a:srgbClr val="20190F"/>
-                </a:solidFill>
-                <a:latin typeface="Arial"/>
+                  <a:srgbClr val="1B1A17"/>
+                </a:solidFill>
+                <a:latin typeface="Verdana"/>
               </a:rPr>
               <a:t>•  60 × 60 × 60 cm · same depth as the bag</a:t>
             </a:r>
@@ -8712,9 +8712,9 @@
             <a:r>
               <a:rPr sz="2600" b="1">
                 <a:solidFill>
-                  <a:srgbClr val="20190F"/>
-                </a:solidFill>
-                <a:latin typeface="Arial"/>
+                  <a:srgbClr val="1B1A17"/>
+                </a:solidFill>
+                <a:latin typeface="Verdana"/>
               </a:rPr>
               <a:t>•  Basin · stake · mulch with a gap</a:t>
             </a:r>
@@ -8728,9 +8728,9 @@
             <a:r>
               <a:rPr sz="2600" b="1">
                 <a:solidFill>
-                  <a:srgbClr val="20190F"/>
-                </a:solidFill>
-                <a:latin typeface="Arial"/>
+                  <a:srgbClr val="1B1A17"/>
+                </a:solidFill>
+                <a:latin typeface="Verdana"/>
               </a:rPr>
               <a:t>•  20 litres of water</a:t>
             </a:r>
@@ -8752,11 +8752,11 @@
             <a:avLst/>
           </a:prstGeom>
           <a:solidFill>
-            <a:srgbClr val="FBF6EC"/>
+            <a:srgbClr val="EFE6D2"/>
           </a:solidFill>
           <a:ln w="15875">
             <a:solidFill>
-              <a:srgbClr val="E2D8C4"/>
+              <a:srgbClr val="2F5D34"/>
             </a:solidFill>
           </a:ln>
           <a:effectLst/>
@@ -8813,9 +8813,9 @@
             <a:r>
               <a:rPr sz="1200" b="1">
                 <a:solidFill>
-                  <a:srgbClr val="C07A1E"/>
-                </a:solidFill>
-                <a:latin typeface="Arial"/>
+                  <a:srgbClr val="B24E2A"/>
+                </a:solidFill>
+                <a:latin typeface="Verdana"/>
               </a:rPr>
               <a:t>POSTER ART · F-P17-ART · coming</a:t>
             </a:r>
@@ -8852,9 +8852,9 @@
             <a:r>
               <a:rPr sz="1800" b="1">
                 <a:solidFill>
-                  <a:srgbClr val="1F4D2B"/>
-                </a:solidFill>
-                <a:latin typeface="Georgia"/>
+                  <a:srgbClr val="1B1A17"/>
+                </a:solidFill>
+                <a:latin typeface="Rockwell"/>
               </a:rPr>
               <a:t>Artwork for F-P17 · Food-forest layers &amp; planting a fruit tree</a:t>
             </a:r>
@@ -8891,9 +8891,9 @@
             <a:r>
               <a:rPr sz="1100" b="0">
                 <a:solidFill>
-                  <a:srgbClr val="20190F"/>
-                </a:solidFill>
-                <a:latin typeface="Arial"/>
+                  <a:srgbClr val="1B1A17"/>
+                </a:solidFill>
+                <a:latin typeface="Verdana"/>
               </a:rPr>
               <a:t>Top 55%: a side view of a small home food forest with seven layers, generic shapes only: a tall canopy tree, a small fruit tree, a bush, herbs, a spreading ground cover, a root crop shown in cut-away below the soil, and a climber twining up the small tree. Fallen leaves on the ground. Bottom 40%: six small steps of planting a fruit tree — a pit with…</a:t>
             </a:r>
@@ -8914,7 +8914,7 @@
     <p:bg>
       <p:bgPr>
         <a:solidFill>
-          <a:srgbClr val="F7F2E9"/>
+          <a:srgbClr val="EFE6D2"/>
         </a:solidFill>
         <a:effectLst/>
       </p:bgPr>
@@ -8956,9 +8956,9 @@
             <a:r>
               <a:rPr sz="1000" b="0">
                 <a:solidFill>
-                  <a:srgbClr val="6B6255"/>
-                </a:solidFill>
-                <a:latin typeface="Arial"/>
+                  <a:srgbClr val="1B1A17"/>
+                </a:solidFill>
+                <a:latin typeface="Verdana"/>
               </a:rPr>
               <a:t>F-D4-18</a:t>
             </a:r>
@@ -8995,9 +8995,9 @@
             <a:r>
               <a:rPr sz="1000" b="0">
                 <a:solidFill>
-                  <a:srgbClr val="6B6255"/>
-                </a:solidFill>
-                <a:latin typeface="Arial"/>
+                  <a:srgbClr val="1B1A17"/>
+                </a:solidFill>
+                <a:latin typeface="Verdana"/>
               </a:rPr>
               <a:t>Grow Food, Grow Strong</a:t>
             </a:r>
@@ -9019,7 +9019,7 @@
             <a:avLst/>
           </a:prstGeom>
           <a:solidFill>
-            <a:srgbClr val="C07A1E"/>
+            <a:srgbClr val="B24E2A"/>
           </a:solidFill>
           <a:ln>
             <a:noFill/>
@@ -9078,9 +9078,9 @@
             <a:r>
               <a:rPr sz="1400" b="1">
                 <a:solidFill>
-                  <a:srgbClr val="F7F2E9"/>
-                </a:solidFill>
-                <a:latin typeface="Arial"/>
+                  <a:srgbClr val="EFE6D2"/>
+                </a:solidFill>
+                <a:latin typeface="Verdana"/>
               </a:rPr>
               <a:t>YOUR TURN</a:t>
             </a:r>
@@ -9117,9 +9117,9 @@
             <a:r>
               <a:rPr sz="3800" b="1">
                 <a:solidFill>
-                  <a:srgbClr val="1F4D2B"/>
-                </a:solidFill>
-                <a:latin typeface="Georgia"/>
+                  <a:srgbClr val="1B1A17"/>
+                </a:solidFill>
+                <a:latin typeface="Rockwell"/>
               </a:rPr>
               <a:t>My planting plan</a:t>
             </a:r>
@@ -9141,7 +9141,7 @@
             <a:avLst/>
           </a:prstGeom>
           <a:solidFill>
-            <a:srgbClr val="E2D8C4"/>
+            <a:srgbClr val="2F5D34"/>
           </a:solidFill>
           <a:ln>
             <a:noFill/>
@@ -9200,9 +9200,9 @@
             <a:r>
               <a:rPr sz="3000" b="1">
                 <a:solidFill>
-                  <a:srgbClr val="20190F"/>
-                </a:solidFill>
-                <a:latin typeface="Arial"/>
+                  <a:srgbClr val="1B1A17"/>
+                </a:solidFill>
+                <a:latin typeface="Verdana"/>
               </a:rPr>
               <a:t>•  Which beds · which crops first</a:t>
             </a:r>
@@ -9216,9 +9216,9 @@
             <a:r>
               <a:rPr sz="3000" b="1">
                 <a:solidFill>
-                  <a:srgbClr val="20190F"/>
-                </a:solidFill>
-                <a:latin typeface="Arial"/>
+                  <a:srgbClr val="1B1A17"/>
+                </a:solidFill>
+                <a:latin typeface="Verdana"/>
               </a:rPr>
               <a:t>•  Where a fruit tree could go</a:t>
             </a:r>
@@ -9240,11 +9240,11 @@
             <a:avLst/>
           </a:prstGeom>
           <a:solidFill>
-            <a:srgbClr val="FBF6EC"/>
+            <a:srgbClr val="EFE6D2"/>
           </a:solidFill>
           <a:ln w="15875">
             <a:solidFill>
-              <a:srgbClr val="E2D8C4"/>
+              <a:srgbClr val="2F5D34"/>
             </a:solidFill>
           </a:ln>
           <a:effectLst/>
@@ -9301,9 +9301,9 @@
             <a:r>
               <a:rPr sz="1200" b="1">
                 <a:solidFill>
-                  <a:srgbClr val="C07A1E"/>
-                </a:solidFill>
-                <a:latin typeface="Arial"/>
+                  <a:srgbClr val="B24E2A"/>
+                </a:solidFill>
+                <a:latin typeface="Verdana"/>
               </a:rPr>
               <a:t>IMAGE · F-IMG-04 · coming</a:t>
             </a:r>
@@ -9340,9 +9340,9 @@
             <a:r>
               <a:rPr sz="1800" b="1">
                 <a:solidFill>
-                  <a:srgbClr val="1F4D2B"/>
-                </a:solidFill>
-                <a:latin typeface="Georgia"/>
+                  <a:srgbClr val="1B1A17"/>
+                </a:solidFill>
+                <a:latin typeface="Rockwell"/>
               </a:rPr>
               <a:t>My garden map</a:t>
             </a:r>
@@ -9379,9 +9379,9 @@
             <a:r>
               <a:rPr sz="1100" b="0">
                 <a:solidFill>
-                  <a:srgbClr val="20190F"/>
-                </a:solidFill>
-                <a:latin typeface="Arial"/>
+                  <a:srgbClr val="1B1A17"/>
+                </a:solidFill>
+                <a:latin typeface="Verdana"/>
               </a:rPr>
               <a:t>A hand-drawn map on paper seen from above: a house square, a north arrow, a tap, blue arrows of water, a sun symbol on the north side, a circle marking zone 1. Pencil and crayon style.</a:t>
             </a:r>
@@ -9402,7 +9402,7 @@
     <p:bg>
       <p:bgPr>
         <a:solidFill>
-          <a:srgbClr val="F7F2E9"/>
+          <a:srgbClr val="EFE6D2"/>
         </a:solidFill>
         <a:effectLst/>
       </p:bgPr>
@@ -9444,9 +9444,9 @@
             <a:r>
               <a:rPr sz="1000" b="0">
                 <a:solidFill>
-                  <a:srgbClr val="6B6255"/>
-                </a:solidFill>
-                <a:latin typeface="Arial"/>
+                  <a:srgbClr val="1B1A17"/>
+                </a:solidFill>
+                <a:latin typeface="Verdana"/>
               </a:rPr>
               <a:t>F-D4-19</a:t>
             </a:r>
@@ -9483,9 +9483,9 @@
             <a:r>
               <a:rPr sz="1000" b="0">
                 <a:solidFill>
-                  <a:srgbClr val="6B6255"/>
-                </a:solidFill>
-                <a:latin typeface="Arial"/>
+                  <a:srgbClr val="1B1A17"/>
+                </a:solidFill>
+                <a:latin typeface="Verdana"/>
               </a:rPr>
               <a:t>Grow Food, Grow Strong</a:t>
             </a:r>
@@ -9522,9 +9522,9 @@
             <a:r>
               <a:rPr sz="3800" b="1">
                 <a:solidFill>
-                  <a:srgbClr val="1F4D2B"/>
-                </a:solidFill>
-                <a:latin typeface="Georgia"/>
+                  <a:srgbClr val="1B1A17"/>
+                </a:solidFill>
+                <a:latin typeface="Rockwell"/>
               </a:rPr>
               <a:t>Tomorrow</a:t>
             </a:r>
@@ -9546,7 +9546,7 @@
             <a:avLst/>
           </a:prstGeom>
           <a:solidFill>
-            <a:srgbClr val="E2D8C4"/>
+            <a:srgbClr val="2F5D34"/>
           </a:solidFill>
           <a:ln>
             <a:noFill/>
@@ -9605,9 +9605,9 @@
             <a:r>
               <a:rPr sz="2400" b="0">
                 <a:solidFill>
-                  <a:srgbClr val="20190F"/>
-                </a:solidFill>
-                <a:latin typeface="Arial"/>
+                  <a:srgbClr val="1B1A17"/>
+                </a:solidFill>
+                <a:latin typeface="Verdana"/>
               </a:rPr>
               <a:t>•  Bring seed to share</a:t>
             </a:r>
@@ -9621,9 +9621,9 @@
             <a:r>
               <a:rPr sz="2400" b="0">
                 <a:solidFill>
-                  <a:srgbClr val="20190F"/>
-                </a:solidFill>
-                <a:latin typeface="Arial"/>
+                  <a:srgbClr val="1B1A17"/>
+                </a:solidFill>
+                <a:latin typeface="Verdana"/>
               </a:rPr>
               <a:t>•  Certificates at 15:15 — families welcome</a:t>
             </a:r>
@@ -9645,11 +9645,11 @@
             <a:avLst/>
           </a:prstGeom>
           <a:solidFill>
-            <a:srgbClr val="FBF6EC"/>
+            <a:srgbClr val="EFE6D2"/>
           </a:solidFill>
           <a:ln w="15875">
             <a:solidFill>
-              <a:srgbClr val="E2D8C4"/>
+              <a:srgbClr val="2F5D34"/>
             </a:solidFill>
           </a:ln>
           <a:effectLst/>
@@ -9706,9 +9706,9 @@
             <a:r>
               <a:rPr sz="1200" b="1">
                 <a:solidFill>
-                  <a:srgbClr val="C07A1E"/>
-                </a:solidFill>
-                <a:latin typeface="Arial"/>
+                  <a:srgbClr val="B24E2A"/>
+                </a:solidFill>
+                <a:latin typeface="Verdana"/>
               </a:rPr>
               <a:t>IMAGE · F-IMG-05 · coming</a:t>
             </a:r>
@@ -9745,9 +9745,9 @@
             <a:r>
               <a:rPr sz="1800" b="1">
                 <a:solidFill>
-                  <a:srgbClr val="1F4D2B"/>
-                </a:solidFill>
-                <a:latin typeface="Georgia"/>
+                  <a:srgbClr val="1B1A17"/>
+                </a:solidFill>
+                <a:latin typeface="Rockwell"/>
               </a:rPr>
               <a:t>Closing circle</a:t>
             </a:r>
@@ -9784,9 +9784,9 @@
             <a:r>
               <a:rPr sz="1100" b="0">
                 <a:solidFill>
-                  <a:srgbClr val="20190F"/>
-                </a:solidFill>
-                <a:latin typeface="Arial"/>
+                  <a:srgbClr val="1B1A17"/>
+                </a:solidFill>
+                <a:latin typeface="Verdana"/>
               </a:rPr>
               <a:t>Late-afternoon warm light; a circle of standing people, one holding up a hand to speak; tools laid neatly on a tarp in the centre.</a:t>
             </a:r>
@@ -9807,7 +9807,7 @@
     <p:bg>
       <p:bgPr>
         <a:solidFill>
-          <a:srgbClr val="F7F2E9"/>
+          <a:srgbClr val="EFE6D2"/>
         </a:solidFill>
         <a:effectLst/>
       </p:bgPr>
@@ -9849,9 +9849,9 @@
             <a:r>
               <a:rPr sz="1000" b="0">
                 <a:solidFill>
-                  <a:srgbClr val="6B6255"/>
-                </a:solidFill>
-                <a:latin typeface="Arial"/>
+                  <a:srgbClr val="1B1A17"/>
+                </a:solidFill>
+                <a:latin typeface="Verdana"/>
               </a:rPr>
               <a:t>F-D4-02   ·   Poster F-P14</a:t>
             </a:r>
@@ -9888,9 +9888,9 @@
             <a:r>
               <a:rPr sz="1000" b="0">
                 <a:solidFill>
-                  <a:srgbClr val="6B6255"/>
-                </a:solidFill>
-                <a:latin typeface="Arial"/>
+                  <a:srgbClr val="1B1A17"/>
+                </a:solidFill>
+                <a:latin typeface="Verdana"/>
               </a:rPr>
               <a:t>Grow Food, Grow Strong</a:t>
             </a:r>
@@ -9927,9 +9927,9 @@
             <a:r>
               <a:rPr sz="3800" b="1">
                 <a:solidFill>
-                  <a:srgbClr val="1F4D2B"/>
-                </a:solidFill>
-                <a:latin typeface="Georgia"/>
+                  <a:srgbClr val="1B1A17"/>
+                </a:solidFill>
+                <a:latin typeface="Rockwell"/>
               </a:rPr>
               <a:t>Seed or seedling?</a:t>
             </a:r>
@@ -9951,7 +9951,7 @@
             <a:avLst/>
           </a:prstGeom>
           <a:solidFill>
-            <a:srgbClr val="E2D8C4"/>
+            <a:srgbClr val="2F5D34"/>
           </a:solidFill>
           <a:ln>
             <a:noFill/>
@@ -10010,9 +10010,9 @@
             <a:r>
               <a:rPr sz="2400" b="0">
                 <a:solidFill>
-                  <a:srgbClr val="20190F"/>
-                </a:solidFill>
-                <a:latin typeface="Arial"/>
+                  <a:srgbClr val="1B1A17"/>
+                </a:solidFill>
+                <a:latin typeface="Verdana"/>
               </a:rPr>
               <a:t>•  Straight in: beans, maize, pumpkin, carrots</a:t>
             </a:r>
@@ -10026,9 +10026,9 @@
             <a:r>
               <a:rPr sz="2400" b="0">
                 <a:solidFill>
-                  <a:srgbClr val="20190F"/>
-                </a:solidFill>
-                <a:latin typeface="Arial"/>
+                  <a:srgbClr val="1B1A17"/>
+                </a:solidFill>
+                <a:latin typeface="Verdana"/>
               </a:rPr>
               <a:t>•  Seedlings first: cabbage, spinach, tomato, onion</a:t>
             </a:r>
@@ -10074,7 +10074,7 @@
             <a:avLst/>
           </a:prstGeom>
           <a:solidFill>
-            <a:srgbClr val="20190F"/>
+            <a:srgbClr val="1B1A17"/>
           </a:solidFill>
           <a:ln>
             <a:noFill/>
@@ -10133,9 +10133,9 @@
             <a:r>
               <a:rPr sz="1100" b="0">
                 <a:solidFill>
-                  <a:srgbClr val="F7F2E9"/>
-                </a:solidFill>
-                <a:latin typeface="Arial"/>
+                  <a:srgbClr val="EFE6D2"/>
+                </a:solidFill>
+                <a:latin typeface="Verdana"/>
               </a:rPr>
               <a:t>▶  Clip F-ANI-19 · play from the tablet: flow-seed-or-seedling.mp4</a:t>
             </a:r>
@@ -10156,7 +10156,7 @@
     <p:bg>
       <p:bgPr>
         <a:solidFill>
-          <a:srgbClr val="F7F2E9"/>
+          <a:srgbClr val="EFE6D2"/>
         </a:solidFill>
         <a:effectLst/>
       </p:bgPr>
@@ -10198,9 +10198,9 @@
             <a:r>
               <a:rPr sz="1000" b="0">
                 <a:solidFill>
-                  <a:srgbClr val="6B6255"/>
-                </a:solidFill>
-                <a:latin typeface="Arial"/>
+                  <a:srgbClr val="1B1A17"/>
+                </a:solidFill>
+                <a:latin typeface="Verdana"/>
               </a:rPr>
               <a:t>F-D4-03   ·   Poster F-P14</a:t>
             </a:r>
@@ -10237,9 +10237,9 @@
             <a:r>
               <a:rPr sz="1000" b="0">
                 <a:solidFill>
-                  <a:srgbClr val="6B6255"/>
-                </a:solidFill>
-                <a:latin typeface="Arial"/>
+                  <a:srgbClr val="1B1A17"/>
+                </a:solidFill>
+                <a:latin typeface="Verdana"/>
               </a:rPr>
               <a:t>Grow Food, Grow Strong</a:t>
             </a:r>
@@ -10261,7 +10261,7 @@
             <a:avLst/>
           </a:prstGeom>
           <a:solidFill>
-            <a:srgbClr val="C07A1E"/>
+            <a:srgbClr val="B24E2A"/>
           </a:solidFill>
           <a:ln>
             <a:noFill/>
@@ -10320,9 +10320,9 @@
             <a:r>
               <a:rPr sz="1400" b="1">
                 <a:solidFill>
-                  <a:srgbClr val="F7F2E9"/>
-                </a:solidFill>
-                <a:latin typeface="Arial"/>
+                  <a:srgbClr val="EFE6D2"/>
+                </a:solidFill>
+                <a:latin typeface="Verdana"/>
               </a:rPr>
               <a:t>YOUR TURN</a:t>
             </a:r>
@@ -10359,9 +10359,9 @@
             <a:r>
               <a:rPr sz="3800" b="1">
                 <a:solidFill>
-                  <a:srgbClr val="1F4D2B"/>
-                </a:solidFill>
-                <a:latin typeface="Georgia"/>
+                  <a:srgbClr val="1B1A17"/>
+                </a:solidFill>
+                <a:latin typeface="Rockwell"/>
               </a:rPr>
               <a:t>Seedling soil</a:t>
             </a:r>
@@ -10383,7 +10383,7 @@
             <a:avLst/>
           </a:prstGeom>
           <a:solidFill>
-            <a:srgbClr val="E2D8C4"/>
+            <a:srgbClr val="2F5D34"/>
           </a:solidFill>
           <a:ln>
             <a:noFill/>
@@ -10442,9 +10442,9 @@
             <a:r>
               <a:rPr sz="3000" b="1">
                 <a:solidFill>
-                  <a:srgbClr val="20190F"/>
-                </a:solidFill>
-                <a:latin typeface="Arial"/>
+                  <a:srgbClr val="1B1A17"/>
+                </a:solidFill>
+                <a:latin typeface="Verdana"/>
               </a:rPr>
               <a:t>•  1 compost : 1 sand : 1 soil</a:t>
             </a:r>
@@ -10458,9 +10458,9 @@
             <a:r>
               <a:rPr sz="3000" b="1">
                 <a:solidFill>
-                  <a:srgbClr val="20190F"/>
-                </a:solidFill>
-                <a:latin typeface="Arial"/>
+                  <a:srgbClr val="1B1A17"/>
+                </a:solidFill>
+                <a:latin typeface="Verdana"/>
               </a:rPr>
               <a:t>•  Sieved · damp, not wet</a:t>
             </a:r>
@@ -10482,11 +10482,11 @@
             <a:avLst/>
           </a:prstGeom>
           <a:solidFill>
-            <a:srgbClr val="FBF6EC"/>
+            <a:srgbClr val="EFE6D2"/>
           </a:solidFill>
           <a:ln w="15875">
             <a:solidFill>
-              <a:srgbClr val="E2D8C4"/>
+              <a:srgbClr val="2F5D34"/>
             </a:solidFill>
           </a:ln>
           <a:effectLst/>
@@ -10543,9 +10543,9 @@
             <a:r>
               <a:rPr sz="1200" b="1">
                 <a:solidFill>
-                  <a:srgbClr val="C07A1E"/>
-                </a:solidFill>
-                <a:latin typeface="Arial"/>
+                  <a:srgbClr val="B24E2A"/>
+                </a:solidFill>
+                <a:latin typeface="Verdana"/>
               </a:rPr>
               <a:t>POSTER ART · F-P14-ART · coming</a:t>
             </a:r>
@@ -10582,9 +10582,9 @@
             <a:r>
               <a:rPr sz="1800" b="1">
                 <a:solidFill>
-                  <a:srgbClr val="1F4D2B"/>
-                </a:solidFill>
-                <a:latin typeface="Georgia"/>
+                  <a:srgbClr val="1B1A17"/>
+                </a:solidFill>
+                <a:latin typeface="Rockwell"/>
               </a:rPr>
               <a:t>Artwork for F-P14 · Grow strong seedlings</a:t>
             </a:r>
@@ -10621,9 +10621,9 @@
             <a:r>
               <a:rPr sz="1100" b="0">
                 <a:solidFill>
-                  <a:srgbClr val="20190F"/>
-                </a:solidFill>
-                <a:latin typeface="Arial"/>
+                  <a:srgbClr val="1B1A17"/>
+                </a:solidFill>
+                <a:latin typeface="Verdana"/>
               </a:rPr>
               <a:t>Left column: two groups of generic seeds — large seeds going straight into a bed; small seeds going into a tray. Centre: three buckets (compost, sand, soil) pouring into a basin through a sieve; a tray of recycled containers (yoghurt tubs, egg box, toilet rolls) with holes; a finger making a hole twice as deep as a seed is wide (show the seed beside the…</a:t>
             </a:r>
@@ -10644,7 +10644,7 @@
     <p:bg>
       <p:bgPr>
         <a:solidFill>
-          <a:srgbClr val="F7F2E9"/>
+          <a:srgbClr val="EFE6D2"/>
         </a:solidFill>
         <a:effectLst/>
       </p:bgPr>
@@ -10686,9 +10686,9 @@
             <a:r>
               <a:rPr sz="1000" b="0">
                 <a:solidFill>
-                  <a:srgbClr val="6B6255"/>
-                </a:solidFill>
-                <a:latin typeface="Arial"/>
+                  <a:srgbClr val="1B1A17"/>
+                </a:solidFill>
+                <a:latin typeface="Verdana"/>
               </a:rPr>
               <a:t>F-D4-04   ·   Poster F-P14</a:t>
             </a:r>
@@ -10725,9 +10725,9 @@
             <a:r>
               <a:rPr sz="1000" b="0">
                 <a:solidFill>
-                  <a:srgbClr val="6B6255"/>
-                </a:solidFill>
-                <a:latin typeface="Arial"/>
+                  <a:srgbClr val="1B1A17"/>
+                </a:solidFill>
+                <a:latin typeface="Verdana"/>
               </a:rPr>
               <a:t>Grow Food, Grow Strong</a:t>
             </a:r>
@@ -10749,7 +10749,7 @@
             <a:avLst/>
           </a:prstGeom>
           <a:solidFill>
-            <a:srgbClr val="C07A1E"/>
+            <a:srgbClr val="B24E2A"/>
           </a:solidFill>
           <a:ln>
             <a:noFill/>
@@ -10808,9 +10808,9 @@
             <a:r>
               <a:rPr sz="1400" b="1">
                 <a:solidFill>
-                  <a:srgbClr val="F7F2E9"/>
-                </a:solidFill>
-                <a:latin typeface="Arial"/>
+                  <a:srgbClr val="EFE6D2"/>
+                </a:solidFill>
+                <a:latin typeface="Verdana"/>
               </a:rPr>
               <a:t>YOUR TURN</a:t>
             </a:r>
@@ -10847,9 +10847,9 @@
             <a:r>
               <a:rPr sz="3800" b="1">
                 <a:solidFill>
-                  <a:srgbClr val="1F4D2B"/>
-                </a:solidFill>
-                <a:latin typeface="Georgia"/>
+                  <a:srgbClr val="1B1A17"/>
+                </a:solidFill>
+                <a:latin typeface="Rockwell"/>
               </a:rPr>
               <a:t>Sow your own tray</a:t>
             </a:r>
@@ -10871,7 +10871,7 @@
             <a:avLst/>
           </a:prstGeom>
           <a:solidFill>
-            <a:srgbClr val="E2D8C4"/>
+            <a:srgbClr val="2F5D34"/>
           </a:solidFill>
           <a:ln>
             <a:noFill/>
@@ -10930,9 +10930,9 @@
             <a:r>
               <a:rPr sz="3000" b="1">
                 <a:solidFill>
-                  <a:srgbClr val="20190F"/>
-                </a:solidFill>
-                <a:latin typeface="Arial"/>
+                  <a:srgbClr val="1B1A17"/>
+                </a:solidFill>
+                <a:latin typeface="Verdana"/>
               </a:rPr>
               <a:t>•  Twice as deep as the seed</a:t>
             </a:r>
@@ -10946,9 +10946,9 @@
             <a:r>
               <a:rPr sz="3000" b="1">
                 <a:solidFill>
-                  <a:srgbClr val="20190F"/>
-                </a:solidFill>
-                <a:latin typeface="Arial"/>
+                  <a:srgbClr val="1B1A17"/>
+                </a:solidFill>
+                <a:latin typeface="Verdana"/>
               </a:rPr>
               <a:t>•  Two seeds per hole</a:t>
             </a:r>
@@ -10962,9 +10962,9 @@
             <a:r>
               <a:rPr sz="3000" b="1">
                 <a:solidFill>
-                  <a:srgbClr val="20190F"/>
-                </a:solidFill>
-                <a:latin typeface="Arial"/>
+                  <a:srgbClr val="1B1A17"/>
+                </a:solidFill>
+                <a:latin typeface="Verdana"/>
               </a:rPr>
               <a:t>•  Label · water · light shade</a:t>
             </a:r>
@@ -10986,11 +10986,11 @@
             <a:avLst/>
           </a:prstGeom>
           <a:solidFill>
-            <a:srgbClr val="FBF6EC"/>
+            <a:srgbClr val="EFE6D2"/>
           </a:solidFill>
           <a:ln w="15875">
             <a:solidFill>
-              <a:srgbClr val="E2D8C4"/>
+              <a:srgbClr val="2F5D34"/>
             </a:solidFill>
           </a:ln>
           <a:effectLst/>
@@ -11047,9 +11047,9 @@
             <a:r>
               <a:rPr sz="1200" b="1">
                 <a:solidFill>
-                  <a:srgbClr val="C07A1E"/>
-                </a:solidFill>
-                <a:latin typeface="Arial"/>
+                  <a:srgbClr val="B24E2A"/>
+                </a:solidFill>
+                <a:latin typeface="Verdana"/>
               </a:rPr>
               <a:t>IMAGE · F-IMG-23 · coming</a:t>
             </a:r>
@@ -11086,9 +11086,9 @@
             <a:r>
               <a:rPr sz="1800" b="1">
                 <a:solidFill>
-                  <a:srgbClr val="1F4D2B"/>
-                </a:solidFill>
-                <a:latin typeface="Georgia"/>
+                  <a:srgbClr val="1B1A17"/>
+                </a:solidFill>
+                <a:latin typeface="Rockwell"/>
               </a:rPr>
               <a:t>Sowing a tray</a:t>
             </a:r>
@@ -11125,9 +11125,9 @@
             <a:r>
               <a:rPr sz="1100" b="0">
                 <a:solidFill>
-                  <a:srgbClr val="20190F"/>
-                </a:solidFill>
-                <a:latin typeface="Arial"/>
+                  <a:srgbClr val="1B1A17"/>
+                </a:solidFill>
+                <a:latin typeface="Verdana"/>
               </a:rPr>
               <a:t>A finger making a small hole in seedling mix in a yoghurt-tub tray; two small seeds beside it for scale; a label cut from a milk bottle.</a:t>
             </a:r>
@@ -11148,7 +11148,7 @@
     <p:bg>
       <p:bgPr>
         <a:solidFill>
-          <a:srgbClr val="F7F2E9"/>
+          <a:srgbClr val="EFE6D2"/>
         </a:solidFill>
         <a:effectLst/>
       </p:bgPr>
@@ -11190,9 +11190,9 @@
             <a:r>
               <a:rPr sz="1000" b="0">
                 <a:solidFill>
-                  <a:srgbClr val="6B6255"/>
-                </a:solidFill>
-                <a:latin typeface="Arial"/>
+                  <a:srgbClr val="1B1A17"/>
+                </a:solidFill>
+                <a:latin typeface="Verdana"/>
               </a:rPr>
               <a:t>F-D4-05   ·   Poster F-P14</a:t>
             </a:r>
@@ -11229,9 +11229,9 @@
             <a:r>
               <a:rPr sz="1000" b="0">
                 <a:solidFill>
-                  <a:srgbClr val="6B6255"/>
-                </a:solidFill>
-                <a:latin typeface="Arial"/>
+                  <a:srgbClr val="1B1A17"/>
+                </a:solidFill>
+                <a:latin typeface="Verdana"/>
               </a:rPr>
               <a:t>Grow Food, Grow Strong</a:t>
             </a:r>
@@ -11268,9 +11268,9 @@
             <a:r>
               <a:rPr sz="3800" b="1">
                 <a:solidFill>
-                  <a:srgbClr val="1F4D2B"/>
-                </a:solidFill>
-                <a:latin typeface="Georgia"/>
+                  <a:srgbClr val="1B1A17"/>
+                </a:solidFill>
+                <a:latin typeface="Rockwell"/>
               </a:rPr>
               <a:t>From tray to bed</a:t>
             </a:r>
@@ -11292,7 +11292,7 @@
             <a:avLst/>
           </a:prstGeom>
           <a:solidFill>
-            <a:srgbClr val="E2D8C4"/>
+            <a:srgbClr val="2F5D34"/>
           </a:solidFill>
           <a:ln>
             <a:noFill/>
@@ -11351,9 +11351,9 @@
             <a:r>
               <a:rPr sz="2400" b="0">
                 <a:solidFill>
-                  <a:srgbClr val="20190F"/>
-                </a:solidFill>
-                <a:latin typeface="Arial"/>
+                  <a:srgbClr val="1B1A17"/>
+                </a:solidFill>
+                <a:latin typeface="Verdana"/>
               </a:rPr>
               <a:t>•  Water every morning, gently</a:t>
             </a:r>
@@ -11367,9 +11367,9 @@
             <a:r>
               <a:rPr sz="2400" b="0">
                 <a:solidFill>
-                  <a:srgbClr val="20190F"/>
-                </a:solidFill>
-                <a:latin typeface="Arial"/>
+                  <a:srgbClr val="1B1A17"/>
+                </a:solidFill>
+                <a:latin typeface="Verdana"/>
               </a:rPr>
               <a:t>•  Harden off for a week</a:t>
             </a:r>
@@ -11383,9 +11383,9 @@
             <a:r>
               <a:rPr sz="2400" b="0">
                 <a:solidFill>
-                  <a:srgbClr val="20190F"/>
-                </a:solidFill>
-                <a:latin typeface="Arial"/>
+                  <a:srgbClr val="1B1A17"/>
+                </a:solidFill>
+                <a:latin typeface="Verdana"/>
               </a:rPr>
               <a:t>•  Plant out at 4–6 leaves, late afternoon</a:t>
             </a:r>
@@ -11407,11 +11407,11 @@
             <a:avLst/>
           </a:prstGeom>
           <a:solidFill>
-            <a:srgbClr val="FBF6EC"/>
+            <a:srgbClr val="EFE6D2"/>
           </a:solidFill>
           <a:ln w="15875">
             <a:solidFill>
-              <a:srgbClr val="E2D8C4"/>
+              <a:srgbClr val="2F5D34"/>
             </a:solidFill>
           </a:ln>
           <a:effectLst/>
@@ -11468,9 +11468,9 @@
             <a:r>
               <a:rPr sz="1200" b="1">
                 <a:solidFill>
-                  <a:srgbClr val="C07A1E"/>
-                </a:solidFill>
-                <a:latin typeface="Arial"/>
+                  <a:srgbClr val="B24E2A"/>
+                </a:solidFill>
+                <a:latin typeface="Verdana"/>
               </a:rPr>
               <a:t>IMAGE · F-IMG-24 · coming</a:t>
             </a:r>
@@ -11507,9 +11507,9 @@
             <a:r>
               <a:rPr sz="1800" b="1">
                 <a:solidFill>
-                  <a:srgbClr val="1F4D2B"/>
-                </a:solidFill>
-                <a:latin typeface="Georgia"/>
+                  <a:srgbClr val="1B1A17"/>
+                </a:solidFill>
+                <a:latin typeface="Rockwell"/>
               </a:rPr>
               <a:t>Hardening off</a:t>
             </a:r>
@@ -11546,9 +11546,9 @@
             <a:r>
               <a:rPr sz="1100" b="0">
                 <a:solidFill>
-                  <a:srgbClr val="20190F"/>
-                </a:solidFill>
-                <a:latin typeface="Arial"/>
+                  <a:srgbClr val="1B1A17"/>
+                </a:solidFill>
+                <a:latin typeface="Verdana"/>
               </a:rPr>
               <a:t>A seedling tray shown in three positions over a week, moving from shade into full sun (three small sun icons growing).</a:t>
             </a:r>
@@ -11569,7 +11569,7 @@
     <p:bg>
       <p:bgPr>
         <a:solidFill>
-          <a:srgbClr val="F7F2E9"/>
+          <a:srgbClr val="EFE6D2"/>
         </a:solidFill>
         <a:effectLst/>
       </p:bgPr>
@@ -11611,9 +11611,9 @@
             <a:r>
               <a:rPr sz="1000" b="0">
                 <a:solidFill>
-                  <a:srgbClr val="6B6255"/>
-                </a:solidFill>
-                <a:latin typeface="Arial"/>
+                  <a:srgbClr val="1B1A17"/>
+                </a:solidFill>
+                <a:latin typeface="Verdana"/>
               </a:rPr>
               <a:t>F-D4-06   ·   Poster F-P15</a:t>
             </a:r>
@@ -11650,9 +11650,9 @@
             <a:r>
               <a:rPr sz="1000" b="0">
                 <a:solidFill>
-                  <a:srgbClr val="6B6255"/>
-                </a:solidFill>
-                <a:latin typeface="Arial"/>
+                  <a:srgbClr val="1B1A17"/>
+                </a:solidFill>
+                <a:latin typeface="Verdana"/>
               </a:rPr>
               <a:t>Grow Food, Grow Strong</a:t>
             </a:r>
@@ -11689,9 +11689,9 @@
             <a:r>
               <a:rPr sz="3800" b="1">
                 <a:solidFill>
-                  <a:srgbClr val="1F4D2B"/>
-                </a:solidFill>
-                <a:latin typeface="Georgia"/>
+                  <a:srgbClr val="1B1A17"/>
+                </a:solidFill>
+                <a:latin typeface="Rockwell"/>
               </a:rPr>
               <a:t>Too close? Too far?</a:t>
             </a:r>
@@ -11713,7 +11713,7 @@
             <a:avLst/>
           </a:prstGeom>
           <a:solidFill>
-            <a:srgbClr val="E2D8C4"/>
+            <a:srgbClr val="2F5D34"/>
           </a:solidFill>
           <a:ln>
             <a:noFill/>
@@ -11772,9 +11772,9 @@
             <a:r>
               <a:rPr sz="2400" b="0">
                 <a:solidFill>
-                  <a:srgbClr val="20190F"/>
-                </a:solidFill>
-                <a:latin typeface="Arial"/>
+                  <a:srgbClr val="1B1A17"/>
+                </a:solidFill>
+                <a:latin typeface="Verdana"/>
               </a:rPr>
               <a:t>•  The right distance = the biggest harvest</a:t>
             </a:r>
@@ -11796,11 +11796,11 @@
             <a:avLst/>
           </a:prstGeom>
           <a:solidFill>
-            <a:srgbClr val="FBF6EC"/>
+            <a:srgbClr val="EFE6D2"/>
           </a:solidFill>
           <a:ln w="15875">
             <a:solidFill>
-              <a:srgbClr val="E2D8C4"/>
+              <a:srgbClr val="2F5D34"/>
             </a:solidFill>
           </a:ln>
           <a:effectLst/>
@@ -11857,9 +11857,9 @@
             <a:r>
               <a:rPr sz="1200" b="1">
                 <a:solidFill>
-                  <a:srgbClr val="C07A1E"/>
-                </a:solidFill>
-                <a:latin typeface="Arial"/>
+                  <a:srgbClr val="B24E2A"/>
+                </a:solidFill>
+                <a:latin typeface="Verdana"/>
               </a:rPr>
               <a:t>ANIMATION · F-ANI-20 · coming</a:t>
             </a:r>
@@ -11896,9 +11896,9 @@
             <a:r>
               <a:rPr sz="1800" b="1">
                 <a:solidFill>
-                  <a:srgbClr val="1F4D2B"/>
-                </a:solidFill>
-                <a:latin typeface="Georgia"/>
+                  <a:srgbClr val="1B1A17"/>
+                </a:solidFill>
+                <a:latin typeface="Rockwell"/>
               </a:rPr>
               <a:t>The spacing stick</a:t>
             </a:r>
@@ -11935,9 +11935,9 @@
             <a:r>
               <a:rPr sz="1100" b="0">
                 <a:solidFill>
-                  <a:srgbClr val="20190F"/>
-                </a:solidFill>
-                <a:latin typeface="Arial"/>
+                  <a:srgbClr val="1B1A17"/>
+                </a:solidFill>
+                <a:latin typeface="Verdana"/>
               </a:rPr>
               <a:t>Top-down view of a bare 1 m × 2 m bed. A 1 m stick with notches every 10 cm lies along the edge; three notches are colour-marked (Leaf, Ochre, Forest). (0–5 s) the stick is laid across the bed and pegs are placed at the Forest (45 cm) notches — two large plant shapes appear down the middle in a triangle pattern. (5–10 s) stick moves; pegs at the Ochre…</a:t>
             </a:r>
@@ -11958,7 +11958,7 @@
     <p:bg>
       <p:bgPr>
         <a:solidFill>
-          <a:srgbClr val="F7F2E9"/>
+          <a:srgbClr val="EFE6D2"/>
         </a:solidFill>
         <a:effectLst/>
       </p:bgPr>
@@ -12000,9 +12000,9 @@
             <a:r>
               <a:rPr sz="1000" b="0">
                 <a:solidFill>
-                  <a:srgbClr val="6B6255"/>
-                </a:solidFill>
-                <a:latin typeface="Arial"/>
+                  <a:srgbClr val="1B1A17"/>
+                </a:solidFill>
+                <a:latin typeface="Verdana"/>
               </a:rPr>
               <a:t>F-D4-07</a:t>
             </a:r>
@@ -12039,9 +12039,9 @@
             <a:r>
               <a:rPr sz="1000" b="0">
                 <a:solidFill>
-                  <a:srgbClr val="6B6255"/>
-                </a:solidFill>
-                <a:latin typeface="Arial"/>
+                  <a:srgbClr val="1B1A17"/>
+                </a:solidFill>
+                <a:latin typeface="Verdana"/>
               </a:rPr>
               <a:t>Grow Food, Grow Strong</a:t>
             </a:r>
@@ -12063,7 +12063,7 @@
             <a:avLst/>
           </a:prstGeom>
           <a:solidFill>
-            <a:srgbClr val="C07A1E"/>
+            <a:srgbClr val="B24E2A"/>
           </a:solidFill>
           <a:ln>
             <a:noFill/>
@@ -12122,9 +12122,9 @@
             <a:r>
               <a:rPr sz="1400" b="1">
                 <a:solidFill>
-                  <a:srgbClr val="F7F2E9"/>
-                </a:solidFill>
-                <a:latin typeface="Arial"/>
+                  <a:srgbClr val="EFE6D2"/>
+                </a:solidFill>
+                <a:latin typeface="Verdana"/>
               </a:rPr>
               <a:t>YOUR TURN</a:t>
             </a:r>
@@ -12161,9 +12161,9 @@
             <a:r>
               <a:rPr sz="3800" b="1">
                 <a:solidFill>
-                  <a:srgbClr val="1F4D2B"/>
-                </a:solidFill>
-                <a:latin typeface="Georgia"/>
+                  <a:srgbClr val="1B1A17"/>
+                </a:solidFill>
+                <a:latin typeface="Rockwell"/>
               </a:rPr>
               <a:t>Make a spacing stick</a:t>
             </a:r>
@@ -12185,7 +12185,7 @@
             <a:avLst/>
           </a:prstGeom>
           <a:solidFill>
-            <a:srgbClr val="E2D8C4"/>
+            <a:srgbClr val="2F5D34"/>
           </a:solidFill>
           <a:ln>
             <a:noFill/>
@@ -12244,9 +12244,9 @@
             <a:r>
               <a:rPr sz="3000" b="1">
                 <a:solidFill>
-                  <a:srgbClr val="20190F"/>
-                </a:solidFill>
-                <a:latin typeface="Arial"/>
+                  <a:srgbClr val="1B1A17"/>
+                </a:solidFill>
+                <a:latin typeface="Verdana"/>
               </a:rPr>
               <a:t>•  1 m stick</a:t>
             </a:r>
@@ -12260,9 +12260,9 @@
             <a:r>
               <a:rPr sz="3000" b="1">
                 <a:solidFill>
-                  <a:srgbClr val="20190F"/>
-                </a:solidFill>
-                <a:latin typeface="Arial"/>
+                  <a:srgbClr val="1B1A17"/>
+                </a:solidFill>
+                <a:latin typeface="Verdana"/>
               </a:rPr>
               <a:t>•  A notch every 10 cm</a:t>
             </a:r>
@@ -12276,9 +12276,9 @@
             <a:r>
               <a:rPr sz="3000" b="1">
                 <a:solidFill>
-                  <a:srgbClr val="20190F"/>
-                </a:solidFill>
-                <a:latin typeface="Arial"/>
+                  <a:srgbClr val="1B1A17"/>
+                </a:solidFill>
+                <a:latin typeface="Verdana"/>
               </a:rPr>
               <a:t>•  Mark 15 · 30 · 45</a:t>
             </a:r>
@@ -12300,11 +12300,11 @@
             <a:avLst/>
           </a:prstGeom>
           <a:solidFill>
-            <a:srgbClr val="FBF6EC"/>
+            <a:srgbClr val="EFE6D2"/>
           </a:solidFill>
           <a:ln w="15875">
             <a:solidFill>
-              <a:srgbClr val="E2D8C4"/>
+              <a:srgbClr val="2F5D34"/>
             </a:solidFill>
           </a:ln>
           <a:effectLst/>
@@ -12361,9 +12361,9 @@
             <a:r>
               <a:rPr sz="1200" b="1">
                 <a:solidFill>
-                  <a:srgbClr val="C07A1E"/>
-                </a:solidFill>
-                <a:latin typeface="Arial"/>
+                  <a:srgbClr val="B24E2A"/>
+                </a:solidFill>
+                <a:latin typeface="Verdana"/>
               </a:rPr>
               <a:t>IMAGE · F-IMG-25 · coming</a:t>
             </a:r>
@@ -12400,9 +12400,9 @@
             <a:r>
               <a:rPr sz="1800" b="1">
                 <a:solidFill>
-                  <a:srgbClr val="1F4D2B"/>
-                </a:solidFill>
-                <a:latin typeface="Georgia"/>
+                  <a:srgbClr val="1B1A17"/>
+                </a:solidFill>
+                <a:latin typeface="Rockwell"/>
               </a:rPr>
               <a:t>Making a spacing stick</a:t>
             </a:r>
@@ -12439,9 +12439,9 @@
             <a:r>
               <a:rPr sz="1100" b="0">
                 <a:solidFill>
-                  <a:srgbClr val="20190F"/>
-                </a:solidFill>
-                <a:latin typeface="Arial"/>
+                  <a:srgbClr val="1B1A17"/>
+                </a:solidFill>
+                <a:latin typeface="Verdana"/>
               </a:rPr>
               <a:t>A 1 m stick with notches being cut with a knife every 10 cm; three notches painted in different colours.</a:t>
             </a:r>
@@ -12462,7 +12462,7 @@
     <p:bg>
       <p:bgPr>
         <a:solidFill>
-          <a:srgbClr val="F7F2E9"/>
+          <a:srgbClr val="EFE6D2"/>
         </a:solidFill>
         <a:effectLst/>
       </p:bgPr>
@@ -12504,9 +12504,9 @@
             <a:r>
               <a:rPr sz="1000" b="0">
                 <a:solidFill>
-                  <a:srgbClr val="6B6255"/>
-                </a:solidFill>
-                <a:latin typeface="Arial"/>
+                  <a:srgbClr val="1B1A17"/>
+                </a:solidFill>
+                <a:latin typeface="Verdana"/>
               </a:rPr>
               <a:t>F-D4-08   ·   Poster F-P15</a:t>
             </a:r>
@@ -12543,9 +12543,9 @@
             <a:r>
               <a:rPr sz="1000" b="0">
                 <a:solidFill>
-                  <a:srgbClr val="6B6255"/>
-                </a:solidFill>
-                <a:latin typeface="Arial"/>
+                  <a:srgbClr val="1B1A17"/>
+                </a:solidFill>
+                <a:latin typeface="Verdana"/>
               </a:rPr>
               <a:t>Grow Food, Grow Strong</a:t>
             </a:r>
@@ -12582,9 +12582,9 @@
             <a:r>
               <a:rPr sz="3800" b="1">
                 <a:solidFill>
-                  <a:srgbClr val="1F4D2B"/>
-                </a:solidFill>
-                <a:latin typeface="Georgia"/>
+                  <a:srgbClr val="1B1A17"/>
+                </a:solidFill>
+                <a:latin typeface="Rockwell"/>
               </a:rPr>
               <a:t>How far apart?</a:t>
             </a:r>
@@ -12606,7 +12606,7 @@
             <a:avLst/>
           </a:prstGeom>
           <a:solidFill>
-            <a:srgbClr val="E2D8C4"/>
+            <a:srgbClr val="2F5D34"/>
           </a:solidFill>
           <a:ln>
             <a:noFill/>
@@ -12665,9 +12665,9 @@
             <a:r>
               <a:rPr sz="2400" b="0">
                 <a:solidFill>
-                  <a:srgbClr val="20190F"/>
-                </a:solidFill>
-                <a:latin typeface="Arial"/>
+                  <a:srgbClr val="1B1A17"/>
+                </a:solidFill>
+                <a:latin typeface="Verdana"/>
               </a:rPr>
               <a:t>•  10 cm onion, beetroot · 15 cm beans</a:t>
             </a:r>
@@ -12681,9 +12681,9 @@
             <a:r>
               <a:rPr sz="2400" b="0">
                 <a:solidFill>
-                  <a:srgbClr val="20190F"/>
-                </a:solidFill>
-                <a:latin typeface="Arial"/>
+                  <a:srgbClr val="1B1A17"/>
+                </a:solidFill>
+                <a:latin typeface="Verdana"/>
               </a:rPr>
               <a:t>•  30 cm spinach, lettuce</a:t>
             </a:r>
@@ -12697,9 +12697,9 @@
             <a:r>
               <a:rPr sz="2400" b="0">
                 <a:solidFill>
-                  <a:srgbClr val="20190F"/>
-                </a:solidFill>
-                <a:latin typeface="Arial"/>
+                  <a:srgbClr val="1B1A17"/>
+                </a:solidFill>
+                <a:latin typeface="Verdana"/>
               </a:rPr>
               <a:t>•  45–50 cm cabbage, tomato</a:t>
             </a:r>
@@ -12721,11 +12721,11 @@
             <a:avLst/>
           </a:prstGeom>
           <a:solidFill>
-            <a:srgbClr val="FBF6EC"/>
+            <a:srgbClr val="EFE6D2"/>
           </a:solidFill>
           <a:ln w="15875">
             <a:solidFill>
-              <a:srgbClr val="E2D8C4"/>
+              <a:srgbClr val="2F5D34"/>
             </a:solidFill>
           </a:ln>
           <a:effectLst/>
@@ -12782,9 +12782,9 @@
             <a:r>
               <a:rPr sz="1200" b="1">
                 <a:solidFill>
-                  <a:srgbClr val="C07A1E"/>
-                </a:solidFill>
-                <a:latin typeface="Arial"/>
+                  <a:srgbClr val="B24E2A"/>
+                </a:solidFill>
+                <a:latin typeface="Verdana"/>
               </a:rPr>
               <a:t>POSTER ART · F-P15-ART · coming</a:t>
             </a:r>
@@ -12821,9 +12821,9 @@
             <a:r>
               <a:rPr sz="1800" b="1">
                 <a:solidFill>
-                  <a:srgbClr val="1F4D2B"/>
-                </a:solidFill>
-                <a:latin typeface="Georgia"/>
+                  <a:srgbClr val="1B1A17"/>
+                </a:solidFill>
+                <a:latin typeface="Rockwell"/>
               </a:rPr>
               <a:t>Artwork for F-P15 · Planting plan: spacing &amp; rotation</a:t>
             </a:r>
@@ -12860,9 +12860,9 @@
             <a:r>
               <a:rPr sz="1100" b="0">
                 <a:solidFill>
-                  <a:srgbClr val="20190F"/>
-                </a:solidFill>
-                <a:latin typeface="Arial"/>
+                  <a:srgbClr val="1B1A17"/>
+                </a:solidFill>
+                <a:latin typeface="Verdana"/>
               </a:rPr>
               <a:t>Top 55%: a 1 m × 2 m bed from above with plants placed in a triangle pattern — a middle line of large round cabbage-like heads, rows of leafy plants on either side, a dense row of thin onion-like shoots at one end, small flowers at the corners; a 1 m spacing stick lying along the edge with notches. Bottom 40%: a four-part wheel (like a clock with four…</a:t>
             </a:r>
@@ -12883,7 +12883,7 @@
     <p:bg>
       <p:bgPr>
         <a:solidFill>
-          <a:srgbClr val="F7F2E9"/>
+          <a:srgbClr val="EFE6D2"/>
         </a:solidFill>
         <a:effectLst/>
       </p:bgPr>
@@ -12925,9 +12925,9 @@
             <a:r>
               <a:rPr sz="1000" b="0">
                 <a:solidFill>
-                  <a:srgbClr val="6B6255"/>
-                </a:solidFill>
-                <a:latin typeface="Arial"/>
+                  <a:srgbClr val="1B1A17"/>
+                </a:solidFill>
+                <a:latin typeface="Verdana"/>
               </a:rPr>
               <a:t>F-D4-09</a:t>
             </a:r>
@@ -12964,9 +12964,9 @@
             <a:r>
               <a:rPr sz="1000" b="0">
                 <a:solidFill>
-                  <a:srgbClr val="6B6255"/>
-                </a:solidFill>
-                <a:latin typeface="Arial"/>
+                  <a:srgbClr val="1B1A17"/>
+                </a:solidFill>
+                <a:latin typeface="Verdana"/>
               </a:rPr>
               <a:t>Grow Food, Grow Strong</a:t>
             </a:r>
@@ -12988,7 +12988,7 @@
             <a:avLst/>
           </a:prstGeom>
           <a:solidFill>
-            <a:srgbClr val="C07A1E"/>
+            <a:srgbClr val="B24E2A"/>
           </a:solidFill>
           <a:ln>
             <a:noFill/>
@@ -13047,9 +13047,9 @@
             <a:r>
               <a:rPr sz="1400" b="1">
                 <a:solidFill>
-                  <a:srgbClr val="F7F2E9"/>
-                </a:solidFill>
-                <a:latin typeface="Arial"/>
+                  <a:srgbClr val="EFE6D2"/>
+                </a:solidFill>
+                <a:latin typeface="Verdana"/>
               </a:rPr>
               <a:t>YOUR TURN</a:t>
             </a:r>
@@ -13086,9 +13086,9 @@
             <a:r>
               <a:rPr sz="3800" b="1">
                 <a:solidFill>
-                  <a:srgbClr val="1F4D2B"/>
-                </a:solidFill>
-                <a:latin typeface="Georgia"/>
+                  <a:srgbClr val="1B1A17"/>
+                </a:solidFill>
+                <a:latin typeface="Rockwell"/>
               </a:rPr>
               <a:t>Plan on paper first</a:t>
             </a:r>
@@ -13110,7 +13110,7 @@
             <a:avLst/>
           </a:prstGeom>
           <a:solidFill>
-            <a:srgbClr val="E2D8C4"/>
+            <a:srgbClr val="2F5D34"/>
           </a:solidFill>
           <a:ln>
             <a:noFill/>
@@ -13169,9 +13169,9 @@
             <a:r>
               <a:rPr sz="2600" b="1">
                 <a:solidFill>
-                  <a:srgbClr val="20190F"/>
-                </a:solidFill>
-                <a:latin typeface="Arial"/>
+                  <a:srgbClr val="1B1A17"/>
+                </a:solidFill>
+                <a:latin typeface="Verdana"/>
               </a:rPr>
               <a:t>•  Draw your 1 m × 2 m bed</a:t>
             </a:r>
@@ -13185,9 +13185,9 @@
             <a:r>
               <a:rPr sz="2600" b="1">
                 <a:solidFill>
-                  <a:srgbClr val="20190F"/>
-                </a:solidFill>
-                <a:latin typeface="Arial"/>
+                  <a:srgbClr val="1B1A17"/>
+                </a:solidFill>
+                <a:latin typeface="Verdana"/>
               </a:rPr>
               <a:t>•  At least 3 crops</a:t>
             </a:r>
@@ -13201,9 +13201,9 @@
             <a:r>
               <a:rPr sz="2600" b="1">
                 <a:solidFill>
-                  <a:srgbClr val="20190F"/>
-                </a:solidFill>
-                <a:latin typeface="Arial"/>
+                  <a:srgbClr val="1B1A17"/>
+                </a:solidFill>
+                <a:latin typeface="Verdana"/>
               </a:rPr>
               <a:t>•  Big in the middle, onions at the ends</a:t>
             </a:r>
@@ -13225,11 +13225,11 @@
             <a:avLst/>
           </a:prstGeom>
           <a:solidFill>
-            <a:srgbClr val="FBF6EC"/>
+            <a:srgbClr val="EFE6D2"/>
           </a:solidFill>
           <a:ln w="15875">
             <a:solidFill>
-              <a:srgbClr val="E2D8C4"/>
+              <a:srgbClr val="2F5D34"/>
             </a:solidFill>
           </a:ln>
           <a:effectLst/>
@@ -13286,9 +13286,9 @@
             <a:r>
               <a:rPr sz="1200" b="1">
                 <a:solidFill>
-                  <a:srgbClr val="C07A1E"/>
-                </a:solidFill>
-                <a:latin typeface="Arial"/>
+                  <a:srgbClr val="B24E2A"/>
+                </a:solidFill>
+                <a:latin typeface="Verdana"/>
               </a:rPr>
               <a:t>IMAGE · F-IMG-26 · coming</a:t>
             </a:r>
@@ -13325,9 +13325,9 @@
             <a:r>
               <a:rPr sz="1800" b="1">
                 <a:solidFill>
-                  <a:srgbClr val="1F4D2B"/>
-                </a:solidFill>
-                <a:latin typeface="Georgia"/>
+                  <a:srgbClr val="1B1A17"/>
+                </a:solidFill>
+                <a:latin typeface="Rockwell"/>
               </a:rPr>
               <a:t>Bed plan on paper</a:t>
             </a:r>
@@ -13364,9 +13364,9 @@
             <a:r>
               <a:rPr sz="1100" b="0">
                 <a:solidFill>
-                  <a:srgbClr val="20190F"/>
-                </a:solidFill>
-                <a:latin typeface="Arial"/>
+                  <a:srgbClr val="1B1A17"/>
+                </a:solidFill>
+                <a:latin typeface="Verdana"/>
               </a:rPr>
               <a:t>A hand-drawn rectangle on paper with circles of different sizes in a triangle pattern, big ones in the middle, small ones at the ends, flowers at the corners.</a:t>
             </a:r>

--- a/courses/build/farmer-5day/F-D4.pptx
+++ b/courses/build/farmer-5day/F-D4.pptx
@@ -1054,7 +1054,7 @@
           </a:p>
           <a:p>
             <a:r>
-              <a:t>Clip F-ANI-23: public/course-animations/food-forest/watch-05-seven-layers.mp4</a:t>
+              <a:t>Clip F-ANI-23: public/course-media/farmer-5day/F-ANI-23.mp4</a:t>
             </a:r>
           </a:p>
         </p:txBody>
@@ -8289,49 +8289,27 @@
           </a:p>
         </p:txBody>
       </p:sp>
-      <p:pic>
-        <p:nvPicPr>
-          <p:cNvPr id="7" name="Picture 6" descr="watch-05-seven-layers.jpg"/>
-          <p:cNvPicPr>
-            <a:picLocks noChangeAspect="1"/>
-          </p:cNvPicPr>
-          <p:nvPr/>
-        </p:nvPicPr>
-        <p:blipFill>
-          <a:blip r:embed="rId2"/>
-          <a:stretch>
-            <a:fillRect/>
-          </a:stretch>
-        </p:blipFill>
-        <p:spPr>
-          <a:xfrm>
-            <a:off x="5852160" y="2308860"/>
-            <a:ext cx="5852160" cy="3291840"/>
-          </a:xfrm>
-          <a:prstGeom prst="rect">
-            <a:avLst/>
-          </a:prstGeom>
-        </p:spPr>
-      </p:pic>
-      <p:sp>
-        <p:nvSpPr>
-          <p:cNvPr id="8" name="Rectangle 7"/>
+      <p:sp>
+        <p:nvSpPr>
+          <p:cNvPr id="7" name="Rectangle 6"/>
           <p:cNvSpPr/>
           <p:nvPr/>
         </p:nvSpPr>
         <p:spPr>
           <a:xfrm>
-            <a:off x="5852160" y="5806440"/>
-            <a:ext cx="5852160" cy="411480"/>
+            <a:off x="5852160" y="1691640"/>
+            <a:ext cx="5852160" cy="4526280"/>
           </a:xfrm>
           <a:prstGeom prst="rect">
             <a:avLst/>
           </a:prstGeom>
           <a:solidFill>
-            <a:srgbClr val="1B1A17"/>
+            <a:srgbClr val="EFE6D2"/>
           </a:solidFill>
-          <a:ln>
-            <a:noFill/>
+          <a:ln w="15875">
+            <a:solidFill>
+              <a:srgbClr val="2F5D34"/>
+            </a:solidFill>
           </a:ln>
           <a:effectLst/>
         </p:spPr>
@@ -8359,22 +8337,61 @@
       </p:sp>
       <p:sp>
         <p:nvSpPr>
+          <p:cNvPr id="8" name="TextBox 7"/>
+          <p:cNvSpPr txBox="1"/>
+          <p:nvPr/>
+        </p:nvSpPr>
+        <p:spPr>
+          <a:xfrm>
+            <a:off x="6080760" y="1874520"/>
+            <a:ext cx="5394960" cy="365760"/>
+          </a:xfrm>
+          <a:prstGeom prst="rect">
+            <a:avLst/>
+          </a:prstGeom>
+          <a:noFill/>
+        </p:spPr>
+        <p:txBody>
+          <a:bodyPr wrap="square" anchor="t" lIns="45720" rIns="45720">
+            <a:spAutoFit/>
+          </a:bodyPr>
+          <a:lstStyle/>
+          <a:p>
+            <a:pPr algn="l">
+              <a:spcAft>
+                <a:spcPts val="800"/>
+              </a:spcAft>
+            </a:pPr>
+            <a:r>
+              <a:rPr sz="1200" b="1">
+                <a:solidFill>
+                  <a:srgbClr val="B24E2A"/>
+                </a:solidFill>
+                <a:latin typeface="Verdana"/>
+              </a:rPr>
+              <a:t>ANIMATION · F-ANI-23 · coming</a:t>
+            </a:r>
+          </a:p>
+        </p:txBody>
+      </p:sp>
+      <p:sp>
+        <p:nvSpPr>
           <p:cNvPr id="9" name="TextBox 8"/>
           <p:cNvSpPr txBox="1"/>
           <p:nvPr/>
         </p:nvSpPr>
         <p:spPr>
           <a:xfrm>
-            <a:off x="5943600" y="5815584"/>
-            <a:ext cx="5669280" cy="384048"/>
-          </a:xfrm>
-          <a:prstGeom prst="rect">
-            <a:avLst/>
-          </a:prstGeom>
-          <a:noFill/>
-        </p:spPr>
-        <p:txBody>
-          <a:bodyPr wrap="square" anchor="ctr" lIns="45720" rIns="45720">
+            <a:off x="6080760" y="2258568"/>
+            <a:ext cx="5394960" cy="457200"/>
+          </a:xfrm>
+          <a:prstGeom prst="rect">
+            <a:avLst/>
+          </a:prstGeom>
+          <a:noFill/>
+        </p:spPr>
+        <p:txBody>
+          <a:bodyPr wrap="square" anchor="t" lIns="45720" rIns="45720">
             <a:spAutoFit/>
           </a:bodyPr>
           <a:lstStyle/>
@@ -8385,13 +8402,52 @@
               </a:spcAft>
             </a:pPr>
             <a:r>
+              <a:rPr sz="1800" b="1">
+                <a:solidFill>
+                  <a:srgbClr val="1B1A17"/>
+                </a:solidFill>
+                <a:latin typeface="Rockwell"/>
+              </a:rPr>
+              <a:t>Seven layers</a:t>
+            </a:r>
+          </a:p>
+        </p:txBody>
+      </p:sp>
+      <p:sp>
+        <p:nvSpPr>
+          <p:cNvPr id="10" name="TextBox 9"/>
+          <p:cNvSpPr txBox="1"/>
+          <p:nvPr/>
+        </p:nvSpPr>
+        <p:spPr>
+          <a:xfrm>
+            <a:off x="6080760" y="2788920"/>
+            <a:ext cx="5394960" cy="3246120"/>
+          </a:xfrm>
+          <a:prstGeom prst="rect">
+            <a:avLst/>
+          </a:prstGeom>
+          <a:noFill/>
+        </p:spPr>
+        <p:txBody>
+          <a:bodyPr wrap="square" anchor="t" lIns="45720" rIns="45720">
+            <a:spAutoFit/>
+          </a:bodyPr>
+          <a:lstStyle/>
+          <a:p>
+            <a:pPr algn="l">
+              <a:spcAft>
+                <a:spcPts val="800"/>
+              </a:spcAft>
+            </a:pPr>
+            <a:r>
               <a:rPr sz="1100" b="0">
                 <a:solidFill>
-                  <a:srgbClr val="EFE6D2"/>
+                  <a:srgbClr val="1B1A17"/>
                 </a:solidFill>
                 <a:latin typeface="Verdana"/>
               </a:rPr>
-              <a:t>▶  Clip F-ANI-23 · play from the tablet: watch-05-seven-layers.mp4</a:t>
+              <a:t>A young food forest grows its layers one after another: tall canopy tree, small fruit tree, bush, herbs, spreading ground cover, a root crop shown in cut-away, and a climber twining up; fallen leaves become mulch. Generic plant shapes. (Replaces the withdrawn clip `food-forest/watch-05-seven-layers.mp4`.)</a:t>
             </a:r>
           </a:p>
         </p:txBody>
